--- a/videoslides/arbeitsblatt-textgleichungen-loesungen-a4.pptx
+++ b/videoslides/arbeitsblatt-textgleichungen-loesungen-a4.pptx
@@ -1092,135 +1092,152 @@
         </p:nvSpPr>
         <p:spPr>
           <a:xfrm>
-            <a:off x="548640" y="502920"/>
-            <a:ext cx="5486400" cy="365760"/>
-          </a:xfrm>
-          <a:prstGeom prst="rect">
-            <a:avLst/>
-          </a:prstGeom>
-          <a:noFill/>
-          <a:ln/>
-        </p:spPr>
-        <p:txBody>
-          <a:bodyPr wrap="square" lIns="0" tIns="0" rIns="0" bIns="0" rtlCol="0" anchor="t"/>
+            <a:off x="548640" y="274320"/>
+            <a:ext cx="2926080" cy="731520"/>
+          </a:xfrm>
+          <a:prstGeom prst="rect">
+            <a:avLst/>
+          </a:prstGeom>
+          <a:noFill/>
+          <a:ln/>
+        </p:spPr>
+        <p:txBody>
+          <a:bodyPr wrap="square" lIns="0" tIns="0" rIns="0" bIns="0" rtlCol="0" anchor="ctr"/>
           <a:lstStyle/>
           <a:p>
             <a:pPr indent="0" marL="0">
               <a:buNone/>
             </a:pPr>
             <a:r>
-              <a:rPr lang="en-US" sz="1800" b="1" dirty="0">
-                <a:solidFill>
-                  <a:srgbClr val="14459A"/>
-                </a:solidFill>
-                <a:latin typeface="Poppins" pitchFamily="34" charset="0"/>
-                <a:ea typeface="Poppins" pitchFamily="34" charset="-122"/>
-                <a:cs typeface="Poppins" pitchFamily="34" charset="-120"/>
-              </a:rPr>
-              <a:t>Lösungsblatt · Mathematik</a:t>
-            </a:r>
-            <a:endParaRPr lang="en-US" sz="1800" dirty="0"/>
-          </a:p>
-        </p:txBody>
-      </p:sp>
-      <p:sp>
-        <p:nvSpPr>
-          <p:cNvPr id="4" name="Text 1"/>
-          <p:cNvSpPr txBox="1"/>
-          <p:nvPr/>
-        </p:nvSpPr>
-        <p:spPr>
-          <a:xfrm>
-            <a:off x="548640" y="868680"/>
-            <a:ext cx="6464808" cy="731520"/>
-          </a:xfrm>
-          <a:prstGeom prst="rect">
-            <a:avLst/>
-          </a:prstGeom>
-          <a:noFill/>
-          <a:ln/>
-        </p:spPr>
-        <p:txBody>
-          <a:bodyPr wrap="square" lIns="0" tIns="0" rIns="0" bIns="0" rtlCol="0" anchor="t"/>
-          <a:lstStyle/>
-          <a:p>
+              <a:rPr lang="en-US" sz="3000" b="1" dirty="0">
+                <a:solidFill>
+                  <a:srgbClr val="475BA6"/>
+                </a:solidFill>
+                <a:latin typeface="Poppins" pitchFamily="34" charset="0"/>
+                <a:ea typeface="Poppins" pitchFamily="34" charset="-122"/>
+                <a:cs typeface="Poppins" pitchFamily="34" charset="-120"/>
+              </a:rPr>
+              <a:t>clever</a:t>
+            </a:r>
             <a:pPr indent="0" marL="0">
+              <a:buNone/>
+            </a:pPr>
+            <a:r>
+              <a:rPr lang="en-US" sz="3000" b="1" dirty="0">
+                <a:solidFill>
+                  <a:srgbClr val="36448A"/>
+                </a:solidFill>
+                <a:latin typeface="Poppins" pitchFamily="34" charset="0"/>
+                <a:ea typeface="Poppins" pitchFamily="34" charset="-122"/>
+                <a:cs typeface="Poppins" pitchFamily="34" charset="-120"/>
+              </a:rPr>
+              <a:t>box</a:t>
+            </a:r>
+            <a:endParaRPr lang="en-US" sz="3000" dirty="0"/>
+          </a:p>
+        </p:txBody>
+      </p:sp>
+      <p:pic>
+        <p:nvPicPr>
+          <p:cNvPr id="4" name="Image 0" descr="QR-Code zu www.cleverbox.co.at">    </p:cNvPr>
+          <p:cNvPicPr>
+            <a:picLocks noChangeAspect="1"/>
+          </p:cNvPicPr>
+          <p:nvPr/>
+        </p:nvPicPr>
+        <p:blipFill>
+          <a:blip r:embed="rId1"/>
+          <a:stretch>
+            <a:fillRect/>
+          </a:stretch>
+        </p:blipFill>
+        <p:spPr>
+          <a:xfrm>
+            <a:off x="6144768" y="228600"/>
+            <a:ext cx="868680" cy="868680"/>
+          </a:xfrm>
+          <a:prstGeom prst="rect">
+            <a:avLst/>
+          </a:prstGeom>
+        </p:spPr>
+      </p:pic>
+      <p:sp>
+        <p:nvSpPr>
+          <p:cNvPr id="5" name="Text 1"/>
+          <p:cNvSpPr txBox="1"/>
+          <p:nvPr/>
+        </p:nvSpPr>
+        <p:spPr>
+          <a:xfrm>
+            <a:off x="3767328" y="274320"/>
+            <a:ext cx="2286000" cy="777240"/>
+          </a:xfrm>
+          <a:prstGeom prst="rect">
+            <a:avLst/>
+          </a:prstGeom>
+          <a:noFill/>
+          <a:ln/>
+        </p:spPr>
+        <p:txBody>
+          <a:bodyPr wrap="square" lIns="0" tIns="0" rIns="0" bIns="0" rtlCol="0" anchor="ctr"/>
+          <a:lstStyle/>
+          <a:p>
+            <a:pPr algn="r" indent="0" marL="0">
               <a:lnSpc>
-                <a:spcPct val="105000"/>
+                <a:spcPct val="120000"/>
               </a:lnSpc>
               <a:buNone/>
             </a:pPr>
             <a:r>
-              <a:rPr lang="en-US" sz="2600" dirty="0">
-                <a:solidFill>
-                  <a:srgbClr val="0B1E3A"/>
-                </a:solidFill>
-                <a:latin typeface="Poppins" pitchFamily="34" charset="0"/>
-                <a:ea typeface="Poppins" pitchFamily="34" charset="-122"/>
-                <a:cs typeface="Poppins" pitchFamily="34" charset="-120"/>
-              </a:rPr>
-              <a:t>Einfache </a:t>
-            </a:r>
-            <a:pPr indent="0" marL="0">
+              <a:rPr lang="en-US" sz="1000" dirty="0">
+                <a:solidFill>
+                  <a:srgbClr val="4A5F7A"/>
+                </a:solidFill>
+                <a:latin typeface="Poppins" pitchFamily="34" charset="0"/>
+                <a:ea typeface="Poppins" pitchFamily="34" charset="-122"/>
+                <a:cs typeface="Poppins" pitchFamily="34" charset="-120"/>
+              </a:rPr>
+              <a:t>Mehr Material:</a:t>
+            </a:r>
+            <a:endParaRPr lang="en-US" sz="1000" dirty="0"/>
+          </a:p>
+          <a:p>
+            <a:pPr algn="r" indent="0" marL="0">
               <a:lnSpc>
-                <a:spcPct val="105000"/>
+                <a:spcPct val="120000"/>
               </a:lnSpc>
               <a:buNone/>
             </a:pPr>
             <a:r>
-              <a:rPr lang="en-US" sz="2600" dirty="0">
-                <a:solidFill>
-                  <a:srgbClr val="14459A"/>
-                </a:solidFill>
-                <a:highlight>
-                  <a:srgbClr val="BCD6F5"/>
-                </a:highlight>
-                <a:latin typeface="Poppins" pitchFamily="34" charset="0"/>
-                <a:ea typeface="Poppins" pitchFamily="34" charset="-122"/>
-                <a:cs typeface="Poppins" pitchFamily="34" charset="-120"/>
-              </a:rPr>
-              <a:t>Textgleichungen</a:t>
-            </a:r>
-            <a:pPr indent="0" marL="0">
-              <a:lnSpc>
-                <a:spcPct val="105000"/>
-              </a:lnSpc>
-              <a:buNone/>
-            </a:pPr>
-            <a:r>
-              <a:rPr lang="en-US" sz="2600" dirty="0">
-                <a:solidFill>
-                  <a:srgbClr val="0B1E3A"/>
-                </a:solidFill>
-                <a:latin typeface="Poppins" pitchFamily="34" charset="0"/>
-                <a:ea typeface="Poppins" pitchFamily="34" charset="-122"/>
-                <a:cs typeface="Poppins" pitchFamily="34" charset="-120"/>
-              </a:rPr>
-              <a:t> – Lösungen</a:t>
-            </a:r>
-            <a:endParaRPr lang="en-US" sz="2600" dirty="0"/>
-          </a:p>
-        </p:txBody>
-      </p:sp>
-      <p:sp>
-        <p:nvSpPr>
-          <p:cNvPr id="5" name="Shape 2"/>
+              <a:rPr lang="en-US" sz="1000" dirty="0">
+                <a:solidFill>
+                  <a:srgbClr val="4A5F7A"/>
+                </a:solidFill>
+                <a:latin typeface="Poppins" pitchFamily="34" charset="0"/>
+                <a:ea typeface="Poppins" pitchFamily="34" charset="-122"/>
+                <a:cs typeface="Poppins" pitchFamily="34" charset="-120"/>
+              </a:rPr>
+              <a:t>www.cleverbox.co.at</a:t>
+            </a:r>
+            <a:endParaRPr lang="en-US" sz="1000" dirty="0"/>
+          </a:p>
+        </p:txBody>
+      </p:sp>
+      <p:sp>
+        <p:nvSpPr>
+          <p:cNvPr id="6" name="Shape 2"/>
           <p:cNvSpPr/>
           <p:nvPr/>
         </p:nvSpPr>
         <p:spPr>
           <a:xfrm>
-            <a:off x="548640" y="1783080"/>
-            <a:ext cx="6464808" cy="457200"/>
-          </a:xfrm>
-          <a:prstGeom prst="roundRect">
-            <a:avLst>
-              <a:gd name="adj" fmla="val 30000"/>
-            </a:avLst>
-          </a:prstGeom>
-          <a:solidFill>
-            <a:srgbClr val="FFFFFF"/>
-          </a:solidFill>
+            <a:off x="548640" y="1188720"/>
+            <a:ext cx="6464808" cy="0"/>
+          </a:xfrm>
+          <a:prstGeom prst="line">
+            <a:avLst/>
+          </a:prstGeom>
+          <a:noFill/>
           <a:ln w="15875">
             <a:solidFill>
               <a:srgbClr val="8DBBF2"/>
@@ -1231,13 +1248,158 @@
       </p:sp>
       <p:sp>
         <p:nvSpPr>
-          <p:cNvPr id="6" name="Shape 3"/>
+          <p:cNvPr id="7" name="Text 3"/>
+          <p:cNvSpPr txBox="1"/>
+          <p:nvPr/>
+        </p:nvSpPr>
+        <p:spPr>
+          <a:xfrm>
+            <a:off x="548640" y="1371600"/>
+            <a:ext cx="5486400" cy="365760"/>
+          </a:xfrm>
+          <a:prstGeom prst="rect">
+            <a:avLst/>
+          </a:prstGeom>
+          <a:noFill/>
+          <a:ln/>
+        </p:spPr>
+        <p:txBody>
+          <a:bodyPr wrap="square" lIns="0" tIns="0" rIns="0" bIns="0" rtlCol="0" anchor="t"/>
+          <a:lstStyle/>
+          <a:p>
+            <a:pPr indent="0" marL="0">
+              <a:buNone/>
+            </a:pPr>
+            <a:r>
+              <a:rPr lang="en-US" sz="1800" b="1" dirty="0">
+                <a:solidFill>
+                  <a:srgbClr val="14459A"/>
+                </a:solidFill>
+                <a:latin typeface="Poppins" pitchFamily="34" charset="0"/>
+                <a:ea typeface="Poppins" pitchFamily="34" charset="-122"/>
+                <a:cs typeface="Poppins" pitchFamily="34" charset="-120"/>
+              </a:rPr>
+              <a:t>Lösungsblatt · Mathematik</a:t>
+            </a:r>
+            <a:endParaRPr lang="en-US" sz="1800" dirty="0"/>
+          </a:p>
+        </p:txBody>
+      </p:sp>
+      <p:sp>
+        <p:nvSpPr>
+          <p:cNvPr id="8" name="Text 4"/>
+          <p:cNvSpPr txBox="1"/>
+          <p:nvPr/>
+        </p:nvSpPr>
+        <p:spPr>
+          <a:xfrm>
+            <a:off x="548640" y="1691640"/>
+            <a:ext cx="6464808" cy="731520"/>
+          </a:xfrm>
+          <a:prstGeom prst="rect">
+            <a:avLst/>
+          </a:prstGeom>
+          <a:noFill/>
+          <a:ln/>
+        </p:spPr>
+        <p:txBody>
+          <a:bodyPr wrap="square" lIns="0" tIns="0" rIns="0" bIns="0" rtlCol="0" anchor="t"/>
+          <a:lstStyle/>
+          <a:p>
+            <a:pPr indent="0" marL="0">
+              <a:lnSpc>
+                <a:spcPct val="105000"/>
+              </a:lnSpc>
+              <a:buNone/>
+            </a:pPr>
+            <a:r>
+              <a:rPr lang="en-US" sz="2600" dirty="0">
+                <a:solidFill>
+                  <a:srgbClr val="0B1E3A"/>
+                </a:solidFill>
+                <a:latin typeface="Poppins" pitchFamily="34" charset="0"/>
+                <a:ea typeface="Poppins" pitchFamily="34" charset="-122"/>
+                <a:cs typeface="Poppins" pitchFamily="34" charset="-120"/>
+              </a:rPr>
+              <a:t>Einfache </a:t>
+            </a:r>
+            <a:pPr indent="0" marL="0">
+              <a:lnSpc>
+                <a:spcPct val="105000"/>
+              </a:lnSpc>
+              <a:buNone/>
+            </a:pPr>
+            <a:r>
+              <a:rPr lang="en-US" sz="2600" dirty="0">
+                <a:solidFill>
+                  <a:srgbClr val="14459A"/>
+                </a:solidFill>
+                <a:highlight>
+                  <a:srgbClr val="BCD6F5"/>
+                </a:highlight>
+                <a:latin typeface="Poppins" pitchFamily="34" charset="0"/>
+                <a:ea typeface="Poppins" pitchFamily="34" charset="-122"/>
+                <a:cs typeface="Poppins" pitchFamily="34" charset="-120"/>
+              </a:rPr>
+              <a:t>Textgleichungen</a:t>
+            </a:r>
+            <a:pPr indent="0" marL="0">
+              <a:lnSpc>
+                <a:spcPct val="105000"/>
+              </a:lnSpc>
+              <a:buNone/>
+            </a:pPr>
+            <a:r>
+              <a:rPr lang="en-US" sz="2600" dirty="0">
+                <a:solidFill>
+                  <a:srgbClr val="0B1E3A"/>
+                </a:solidFill>
+                <a:latin typeface="Poppins" pitchFamily="34" charset="0"/>
+                <a:ea typeface="Poppins" pitchFamily="34" charset="-122"/>
+                <a:cs typeface="Poppins" pitchFamily="34" charset="-120"/>
+              </a:rPr>
+              <a:t> – Lösungen</a:t>
+            </a:r>
+            <a:endParaRPr lang="en-US" sz="2600" dirty="0"/>
+          </a:p>
+        </p:txBody>
+      </p:sp>
+      <p:sp>
+        <p:nvSpPr>
+          <p:cNvPr id="9" name="Shape 5"/>
           <p:cNvSpPr/>
           <p:nvPr/>
         </p:nvSpPr>
         <p:spPr>
           <a:xfrm>
-            <a:off x="640080" y="1847088"/>
+            <a:off x="548640" y="2560320"/>
+            <a:ext cx="6464808" cy="420624"/>
+          </a:xfrm>
+          <a:prstGeom prst="roundRect">
+            <a:avLst>
+              <a:gd name="adj" fmla="val 32609"/>
+            </a:avLst>
+          </a:prstGeom>
+          <a:solidFill>
+            <a:srgbClr val="FFFFFF"/>
+          </a:solidFill>
+          <a:ln w="15875">
+            <a:solidFill>
+              <a:srgbClr val="8DBBF2"/>
+            </a:solidFill>
+            <a:prstDash val="solid"/>
+          </a:ln>
+        </p:spPr>
+      </p:sp>
+      <p:sp>
+        <p:nvSpPr>
+          <p:cNvPr id="10" name="Shape 6"/>
+          <p:cNvSpPr/>
+          <p:nvPr/>
+        </p:nvSpPr>
+        <p:spPr>
+          <a:xfrm>
+            <a:off x="640080" y="2606040"/>
             <a:ext cx="329184" cy="329184"/>
           </a:xfrm>
           <a:prstGeom prst="ellipse">
@@ -1256,13 +1418,13 @@
       </p:sp>
       <p:sp>
         <p:nvSpPr>
-          <p:cNvPr id="7" name="Text 4"/>
-          <p:cNvSpPr txBox="1"/>
-          <p:nvPr/>
-        </p:nvSpPr>
-        <p:spPr>
-          <a:xfrm>
-            <a:off x="640080" y="1847088"/>
+          <p:cNvPr id="11" name="Text 7"/>
+          <p:cNvSpPr txBox="1"/>
+          <p:nvPr/>
+        </p:nvSpPr>
+        <p:spPr>
+          <a:xfrm>
+            <a:off x="640080" y="2606040"/>
             <a:ext cx="329184" cy="329184"/>
           </a:xfrm>
           <a:prstGeom prst="rect">
@@ -1295,14 +1457,14 @@
       </p:sp>
       <p:sp>
         <p:nvSpPr>
-          <p:cNvPr id="8" name="Text 5"/>
-          <p:cNvSpPr txBox="1"/>
-          <p:nvPr/>
-        </p:nvSpPr>
-        <p:spPr>
-          <a:xfrm>
-            <a:off x="1097280" y="1783080"/>
-            <a:ext cx="3657600" cy="457200"/>
+          <p:cNvPr id="12" name="Text 8"/>
+          <p:cNvSpPr txBox="1"/>
+          <p:nvPr/>
+        </p:nvSpPr>
+        <p:spPr>
+          <a:xfrm>
+            <a:off x="1097280" y="2560320"/>
+            <a:ext cx="3657600" cy="420624"/>
           </a:xfrm>
           <a:prstGeom prst="rect">
             <a:avLst/>
@@ -1334,14 +1496,14 @@
       </p:sp>
       <p:sp>
         <p:nvSpPr>
-          <p:cNvPr id="9" name="Text 6"/>
-          <p:cNvSpPr txBox="1"/>
-          <p:nvPr/>
-        </p:nvSpPr>
-        <p:spPr>
-          <a:xfrm>
-            <a:off x="4663440" y="1783080"/>
-            <a:ext cx="2240280" cy="457200"/>
+          <p:cNvPr id="13" name="Text 9"/>
+          <p:cNvSpPr txBox="1"/>
+          <p:nvPr/>
+        </p:nvSpPr>
+        <p:spPr>
+          <a:xfrm>
+            <a:off x="4663440" y="2560320"/>
+            <a:ext cx="2240280" cy="420624"/>
           </a:xfrm>
           <a:prstGeom prst="rect">
             <a:avLst/>
@@ -1373,18 +1535,18 @@
       </p:sp>
       <p:sp>
         <p:nvSpPr>
-          <p:cNvPr id="10" name="Shape 7"/>
+          <p:cNvPr id="14" name="Shape 10"/>
           <p:cNvSpPr/>
           <p:nvPr/>
         </p:nvSpPr>
         <p:spPr>
           <a:xfrm>
-            <a:off x="548640" y="2304288"/>
-            <a:ext cx="6464808" cy="457200"/>
+            <a:off x="548640" y="3035808"/>
+            <a:ext cx="6464808" cy="420624"/>
           </a:xfrm>
           <a:prstGeom prst="roundRect">
             <a:avLst>
-              <a:gd name="adj" fmla="val 30000"/>
+              <a:gd name="adj" fmla="val 32609"/>
             </a:avLst>
           </a:prstGeom>
           <a:solidFill>
@@ -1400,13 +1562,13 @@
       </p:sp>
       <p:sp>
         <p:nvSpPr>
-          <p:cNvPr id="11" name="Shape 8"/>
+          <p:cNvPr id="15" name="Shape 11"/>
           <p:cNvSpPr/>
           <p:nvPr/>
         </p:nvSpPr>
         <p:spPr>
           <a:xfrm>
-            <a:off x="640080" y="2368296"/>
+            <a:off x="640080" y="3081528"/>
             <a:ext cx="329184" cy="329184"/>
           </a:xfrm>
           <a:prstGeom prst="ellipse">
@@ -1425,13 +1587,13 @@
       </p:sp>
       <p:sp>
         <p:nvSpPr>
-          <p:cNvPr id="12" name="Text 9"/>
-          <p:cNvSpPr txBox="1"/>
-          <p:nvPr/>
-        </p:nvSpPr>
-        <p:spPr>
-          <a:xfrm>
-            <a:off x="640080" y="2368296"/>
+          <p:cNvPr id="16" name="Text 12"/>
+          <p:cNvSpPr txBox="1"/>
+          <p:nvPr/>
+        </p:nvSpPr>
+        <p:spPr>
+          <a:xfrm>
+            <a:off x="640080" y="3081528"/>
             <a:ext cx="329184" cy="329184"/>
           </a:xfrm>
           <a:prstGeom prst="rect">
@@ -1464,14 +1626,14 @@
       </p:sp>
       <p:sp>
         <p:nvSpPr>
-          <p:cNvPr id="13" name="Text 10"/>
-          <p:cNvSpPr txBox="1"/>
-          <p:nvPr/>
-        </p:nvSpPr>
-        <p:spPr>
-          <a:xfrm>
-            <a:off x="1097280" y="2304288"/>
-            <a:ext cx="3657600" cy="457200"/>
+          <p:cNvPr id="17" name="Text 13"/>
+          <p:cNvSpPr txBox="1"/>
+          <p:nvPr/>
+        </p:nvSpPr>
+        <p:spPr>
+          <a:xfrm>
+            <a:off x="1097280" y="3035808"/>
+            <a:ext cx="3657600" cy="420624"/>
           </a:xfrm>
           <a:prstGeom prst="rect">
             <a:avLst/>
@@ -1503,14 +1665,14 @@
       </p:sp>
       <p:sp>
         <p:nvSpPr>
-          <p:cNvPr id="14" name="Text 11"/>
-          <p:cNvSpPr txBox="1"/>
-          <p:nvPr/>
-        </p:nvSpPr>
-        <p:spPr>
-          <a:xfrm>
-            <a:off x="4663440" y="2304288"/>
-            <a:ext cx="2240280" cy="457200"/>
+          <p:cNvPr id="18" name="Text 14"/>
+          <p:cNvSpPr txBox="1"/>
+          <p:nvPr/>
+        </p:nvSpPr>
+        <p:spPr>
+          <a:xfrm>
+            <a:off x="4663440" y="3035808"/>
+            <a:ext cx="2240280" cy="420624"/>
           </a:xfrm>
           <a:prstGeom prst="rect">
             <a:avLst/>
@@ -1542,18 +1704,18 @@
       </p:sp>
       <p:sp>
         <p:nvSpPr>
-          <p:cNvPr id="15" name="Shape 12"/>
+          <p:cNvPr id="19" name="Shape 15"/>
           <p:cNvSpPr/>
           <p:nvPr/>
         </p:nvSpPr>
         <p:spPr>
           <a:xfrm>
-            <a:off x="548640" y="2825496"/>
-            <a:ext cx="6464808" cy="457200"/>
+            <a:off x="548640" y="3511296"/>
+            <a:ext cx="6464808" cy="420624"/>
           </a:xfrm>
           <a:prstGeom prst="roundRect">
             <a:avLst>
-              <a:gd name="adj" fmla="val 30000"/>
+              <a:gd name="adj" fmla="val 32609"/>
             </a:avLst>
           </a:prstGeom>
           <a:solidFill>
@@ -1569,13 +1731,13 @@
       </p:sp>
       <p:sp>
         <p:nvSpPr>
-          <p:cNvPr id="16" name="Shape 13"/>
+          <p:cNvPr id="20" name="Shape 16"/>
           <p:cNvSpPr/>
           <p:nvPr/>
         </p:nvSpPr>
         <p:spPr>
           <a:xfrm>
-            <a:off x="640080" y="2889504"/>
+            <a:off x="640080" y="3557016"/>
             <a:ext cx="329184" cy="329184"/>
           </a:xfrm>
           <a:prstGeom prst="ellipse">
@@ -1594,13 +1756,13 @@
       </p:sp>
       <p:sp>
         <p:nvSpPr>
-          <p:cNvPr id="17" name="Text 14"/>
-          <p:cNvSpPr txBox="1"/>
-          <p:nvPr/>
-        </p:nvSpPr>
-        <p:spPr>
-          <a:xfrm>
-            <a:off x="640080" y="2889504"/>
+          <p:cNvPr id="21" name="Text 17"/>
+          <p:cNvSpPr txBox="1"/>
+          <p:nvPr/>
+        </p:nvSpPr>
+        <p:spPr>
+          <a:xfrm>
+            <a:off x="640080" y="3557016"/>
             <a:ext cx="329184" cy="329184"/>
           </a:xfrm>
           <a:prstGeom prst="rect">
@@ -1633,14 +1795,14 @@
       </p:sp>
       <p:sp>
         <p:nvSpPr>
-          <p:cNvPr id="18" name="Text 15"/>
-          <p:cNvSpPr txBox="1"/>
-          <p:nvPr/>
-        </p:nvSpPr>
-        <p:spPr>
-          <a:xfrm>
-            <a:off x="1097280" y="2825496"/>
-            <a:ext cx="3657600" cy="457200"/>
+          <p:cNvPr id="22" name="Text 18"/>
+          <p:cNvSpPr txBox="1"/>
+          <p:nvPr/>
+        </p:nvSpPr>
+        <p:spPr>
+          <a:xfrm>
+            <a:off x="1097280" y="3511296"/>
+            <a:ext cx="3657600" cy="420624"/>
           </a:xfrm>
           <a:prstGeom prst="rect">
             <a:avLst/>
@@ -1672,14 +1834,14 @@
       </p:sp>
       <p:sp>
         <p:nvSpPr>
-          <p:cNvPr id="19" name="Text 16"/>
-          <p:cNvSpPr txBox="1"/>
-          <p:nvPr/>
-        </p:nvSpPr>
-        <p:spPr>
-          <a:xfrm>
-            <a:off x="4663440" y="2825496"/>
-            <a:ext cx="2240280" cy="457200"/>
+          <p:cNvPr id="23" name="Text 19"/>
+          <p:cNvSpPr txBox="1"/>
+          <p:nvPr/>
+        </p:nvSpPr>
+        <p:spPr>
+          <a:xfrm>
+            <a:off x="4663440" y="3511296"/>
+            <a:ext cx="2240280" cy="420624"/>
           </a:xfrm>
           <a:prstGeom prst="rect">
             <a:avLst/>
@@ -1711,18 +1873,18 @@
       </p:sp>
       <p:sp>
         <p:nvSpPr>
-          <p:cNvPr id="20" name="Shape 17"/>
+          <p:cNvPr id="24" name="Shape 20"/>
           <p:cNvSpPr/>
           <p:nvPr/>
         </p:nvSpPr>
         <p:spPr>
           <a:xfrm>
-            <a:off x="548640" y="3346704"/>
-            <a:ext cx="6464808" cy="457200"/>
+            <a:off x="548640" y="3986784"/>
+            <a:ext cx="6464808" cy="420624"/>
           </a:xfrm>
           <a:prstGeom prst="roundRect">
             <a:avLst>
-              <a:gd name="adj" fmla="val 30000"/>
+              <a:gd name="adj" fmla="val 32609"/>
             </a:avLst>
           </a:prstGeom>
           <a:solidFill>
@@ -1738,13 +1900,13 @@
       </p:sp>
       <p:sp>
         <p:nvSpPr>
-          <p:cNvPr id="21" name="Shape 18"/>
+          <p:cNvPr id="25" name="Shape 21"/>
           <p:cNvSpPr/>
           <p:nvPr/>
         </p:nvSpPr>
         <p:spPr>
           <a:xfrm>
-            <a:off x="640080" y="3410712"/>
+            <a:off x="640080" y="4032504"/>
             <a:ext cx="329184" cy="329184"/>
           </a:xfrm>
           <a:prstGeom prst="ellipse">
@@ -1763,13 +1925,13 @@
       </p:sp>
       <p:sp>
         <p:nvSpPr>
-          <p:cNvPr id="22" name="Text 19"/>
-          <p:cNvSpPr txBox="1"/>
-          <p:nvPr/>
-        </p:nvSpPr>
-        <p:spPr>
-          <a:xfrm>
-            <a:off x="640080" y="3410712"/>
+          <p:cNvPr id="26" name="Text 22"/>
+          <p:cNvSpPr txBox="1"/>
+          <p:nvPr/>
+        </p:nvSpPr>
+        <p:spPr>
+          <a:xfrm>
+            <a:off x="640080" y="4032504"/>
             <a:ext cx="329184" cy="329184"/>
           </a:xfrm>
           <a:prstGeom prst="rect">
@@ -1802,14 +1964,14 @@
       </p:sp>
       <p:sp>
         <p:nvSpPr>
-          <p:cNvPr id="23" name="Text 20"/>
-          <p:cNvSpPr txBox="1"/>
-          <p:nvPr/>
-        </p:nvSpPr>
-        <p:spPr>
-          <a:xfrm>
-            <a:off x="1097280" y="3346704"/>
-            <a:ext cx="3657600" cy="457200"/>
+          <p:cNvPr id="27" name="Text 23"/>
+          <p:cNvSpPr txBox="1"/>
+          <p:nvPr/>
+        </p:nvSpPr>
+        <p:spPr>
+          <a:xfrm>
+            <a:off x="1097280" y="3986784"/>
+            <a:ext cx="3657600" cy="420624"/>
           </a:xfrm>
           <a:prstGeom prst="rect">
             <a:avLst/>
@@ -1841,14 +2003,14 @@
       </p:sp>
       <p:sp>
         <p:nvSpPr>
-          <p:cNvPr id="24" name="Text 21"/>
-          <p:cNvSpPr txBox="1"/>
-          <p:nvPr/>
-        </p:nvSpPr>
-        <p:spPr>
-          <a:xfrm>
-            <a:off x="4663440" y="3346704"/>
-            <a:ext cx="2240280" cy="457200"/>
+          <p:cNvPr id="28" name="Text 24"/>
+          <p:cNvSpPr txBox="1"/>
+          <p:nvPr/>
+        </p:nvSpPr>
+        <p:spPr>
+          <a:xfrm>
+            <a:off x="4663440" y="3986784"/>
+            <a:ext cx="2240280" cy="420624"/>
           </a:xfrm>
           <a:prstGeom prst="rect">
             <a:avLst/>
@@ -1880,18 +2042,18 @@
       </p:sp>
       <p:sp>
         <p:nvSpPr>
-          <p:cNvPr id="25" name="Shape 22"/>
+          <p:cNvPr id="29" name="Shape 25"/>
           <p:cNvSpPr/>
           <p:nvPr/>
         </p:nvSpPr>
         <p:spPr>
           <a:xfrm>
-            <a:off x="548640" y="3867912"/>
-            <a:ext cx="6464808" cy="457200"/>
+            <a:off x="548640" y="4462272"/>
+            <a:ext cx="6464808" cy="420624"/>
           </a:xfrm>
           <a:prstGeom prst="roundRect">
             <a:avLst>
-              <a:gd name="adj" fmla="val 30000"/>
+              <a:gd name="adj" fmla="val 32609"/>
             </a:avLst>
           </a:prstGeom>
           <a:solidFill>
@@ -1907,13 +2069,13 @@
       </p:sp>
       <p:sp>
         <p:nvSpPr>
-          <p:cNvPr id="26" name="Shape 23"/>
+          <p:cNvPr id="30" name="Shape 26"/>
           <p:cNvSpPr/>
           <p:nvPr/>
         </p:nvSpPr>
         <p:spPr>
           <a:xfrm>
-            <a:off x="640080" y="3931920"/>
+            <a:off x="640080" y="4507992"/>
             <a:ext cx="329184" cy="329184"/>
           </a:xfrm>
           <a:prstGeom prst="ellipse">
@@ -1932,13 +2094,13 @@
       </p:sp>
       <p:sp>
         <p:nvSpPr>
-          <p:cNvPr id="27" name="Text 24"/>
-          <p:cNvSpPr txBox="1"/>
-          <p:nvPr/>
-        </p:nvSpPr>
-        <p:spPr>
-          <a:xfrm>
-            <a:off x="640080" y="3931920"/>
+          <p:cNvPr id="31" name="Text 27"/>
+          <p:cNvSpPr txBox="1"/>
+          <p:nvPr/>
+        </p:nvSpPr>
+        <p:spPr>
+          <a:xfrm>
+            <a:off x="640080" y="4507992"/>
             <a:ext cx="329184" cy="329184"/>
           </a:xfrm>
           <a:prstGeom prst="rect">
@@ -1971,14 +2133,14 @@
       </p:sp>
       <p:sp>
         <p:nvSpPr>
-          <p:cNvPr id="28" name="Text 25"/>
-          <p:cNvSpPr txBox="1"/>
-          <p:nvPr/>
-        </p:nvSpPr>
-        <p:spPr>
-          <a:xfrm>
-            <a:off x="1097280" y="3867912"/>
-            <a:ext cx="3657600" cy="457200"/>
+          <p:cNvPr id="32" name="Text 28"/>
+          <p:cNvSpPr txBox="1"/>
+          <p:nvPr/>
+        </p:nvSpPr>
+        <p:spPr>
+          <a:xfrm>
+            <a:off x="1097280" y="4462272"/>
+            <a:ext cx="3657600" cy="420624"/>
           </a:xfrm>
           <a:prstGeom prst="rect">
             <a:avLst/>
@@ -2010,14 +2172,14 @@
       </p:sp>
       <p:sp>
         <p:nvSpPr>
-          <p:cNvPr id="29" name="Text 26"/>
-          <p:cNvSpPr txBox="1"/>
-          <p:nvPr/>
-        </p:nvSpPr>
-        <p:spPr>
-          <a:xfrm>
-            <a:off x="4663440" y="3867912"/>
-            <a:ext cx="2240280" cy="457200"/>
+          <p:cNvPr id="33" name="Text 29"/>
+          <p:cNvSpPr txBox="1"/>
+          <p:nvPr/>
+        </p:nvSpPr>
+        <p:spPr>
+          <a:xfrm>
+            <a:off x="4663440" y="4462272"/>
+            <a:ext cx="2240280" cy="420624"/>
           </a:xfrm>
           <a:prstGeom prst="rect">
             <a:avLst/>
@@ -2049,18 +2211,18 @@
       </p:sp>
       <p:sp>
         <p:nvSpPr>
-          <p:cNvPr id="30" name="Shape 27"/>
+          <p:cNvPr id="34" name="Shape 30"/>
           <p:cNvSpPr/>
           <p:nvPr/>
         </p:nvSpPr>
         <p:spPr>
           <a:xfrm>
-            <a:off x="548640" y="4389120"/>
-            <a:ext cx="6464808" cy="457200"/>
+            <a:off x="548640" y="4937760"/>
+            <a:ext cx="6464808" cy="420624"/>
           </a:xfrm>
           <a:prstGeom prst="roundRect">
             <a:avLst>
-              <a:gd name="adj" fmla="val 30000"/>
+              <a:gd name="adj" fmla="val 32609"/>
             </a:avLst>
           </a:prstGeom>
           <a:solidFill>
@@ -2076,13 +2238,13 @@
       </p:sp>
       <p:sp>
         <p:nvSpPr>
-          <p:cNvPr id="31" name="Shape 28"/>
+          <p:cNvPr id="35" name="Shape 31"/>
           <p:cNvSpPr/>
           <p:nvPr/>
         </p:nvSpPr>
         <p:spPr>
           <a:xfrm>
-            <a:off x="640080" y="4453128"/>
+            <a:off x="640080" y="4983480"/>
             <a:ext cx="329184" cy="329184"/>
           </a:xfrm>
           <a:prstGeom prst="ellipse">
@@ -2101,13 +2263,13 @@
       </p:sp>
       <p:sp>
         <p:nvSpPr>
-          <p:cNvPr id="32" name="Text 29"/>
-          <p:cNvSpPr txBox="1"/>
-          <p:nvPr/>
-        </p:nvSpPr>
-        <p:spPr>
-          <a:xfrm>
-            <a:off x="640080" y="4453128"/>
+          <p:cNvPr id="36" name="Text 32"/>
+          <p:cNvSpPr txBox="1"/>
+          <p:nvPr/>
+        </p:nvSpPr>
+        <p:spPr>
+          <a:xfrm>
+            <a:off x="640080" y="4983480"/>
             <a:ext cx="329184" cy="329184"/>
           </a:xfrm>
           <a:prstGeom prst="rect">
@@ -2140,14 +2302,14 @@
       </p:sp>
       <p:sp>
         <p:nvSpPr>
-          <p:cNvPr id="33" name="Text 30"/>
-          <p:cNvSpPr txBox="1"/>
-          <p:nvPr/>
-        </p:nvSpPr>
-        <p:spPr>
-          <a:xfrm>
-            <a:off x="1097280" y="4389120"/>
-            <a:ext cx="3657600" cy="457200"/>
+          <p:cNvPr id="37" name="Text 33"/>
+          <p:cNvSpPr txBox="1"/>
+          <p:nvPr/>
+        </p:nvSpPr>
+        <p:spPr>
+          <a:xfrm>
+            <a:off x="1097280" y="4937760"/>
+            <a:ext cx="3657600" cy="420624"/>
           </a:xfrm>
           <a:prstGeom prst="rect">
             <a:avLst/>
@@ -2179,14 +2341,14 @@
       </p:sp>
       <p:sp>
         <p:nvSpPr>
-          <p:cNvPr id="34" name="Text 31"/>
-          <p:cNvSpPr txBox="1"/>
-          <p:nvPr/>
-        </p:nvSpPr>
-        <p:spPr>
-          <a:xfrm>
-            <a:off x="4663440" y="4389120"/>
-            <a:ext cx="2240280" cy="457200"/>
+          <p:cNvPr id="38" name="Text 34"/>
+          <p:cNvSpPr txBox="1"/>
+          <p:nvPr/>
+        </p:nvSpPr>
+        <p:spPr>
+          <a:xfrm>
+            <a:off x="4663440" y="4937760"/>
+            <a:ext cx="2240280" cy="420624"/>
           </a:xfrm>
           <a:prstGeom prst="rect">
             <a:avLst/>
@@ -2218,18 +2380,18 @@
       </p:sp>
       <p:sp>
         <p:nvSpPr>
-          <p:cNvPr id="35" name="Shape 32"/>
+          <p:cNvPr id="39" name="Shape 35"/>
           <p:cNvSpPr/>
           <p:nvPr/>
         </p:nvSpPr>
         <p:spPr>
           <a:xfrm>
-            <a:off x="548640" y="4910328"/>
-            <a:ext cx="6464808" cy="457200"/>
+            <a:off x="548640" y="5413248"/>
+            <a:ext cx="6464808" cy="420624"/>
           </a:xfrm>
           <a:prstGeom prst="roundRect">
             <a:avLst>
-              <a:gd name="adj" fmla="val 30000"/>
+              <a:gd name="adj" fmla="val 32609"/>
             </a:avLst>
           </a:prstGeom>
           <a:solidFill>
@@ -2245,13 +2407,13 @@
       </p:sp>
       <p:sp>
         <p:nvSpPr>
-          <p:cNvPr id="36" name="Shape 33"/>
+          <p:cNvPr id="40" name="Shape 36"/>
           <p:cNvSpPr/>
           <p:nvPr/>
         </p:nvSpPr>
         <p:spPr>
           <a:xfrm>
-            <a:off x="640080" y="4974336"/>
+            <a:off x="640080" y="5458968"/>
             <a:ext cx="329184" cy="329184"/>
           </a:xfrm>
           <a:prstGeom prst="ellipse">
@@ -2270,13 +2432,13 @@
       </p:sp>
       <p:sp>
         <p:nvSpPr>
-          <p:cNvPr id="37" name="Text 34"/>
-          <p:cNvSpPr txBox="1"/>
-          <p:nvPr/>
-        </p:nvSpPr>
-        <p:spPr>
-          <a:xfrm>
-            <a:off x="640080" y="4974336"/>
+          <p:cNvPr id="41" name="Text 37"/>
+          <p:cNvSpPr txBox="1"/>
+          <p:nvPr/>
+        </p:nvSpPr>
+        <p:spPr>
+          <a:xfrm>
+            <a:off x="640080" y="5458968"/>
             <a:ext cx="329184" cy="329184"/>
           </a:xfrm>
           <a:prstGeom prst="rect">
@@ -2309,14 +2471,14 @@
       </p:sp>
       <p:sp>
         <p:nvSpPr>
-          <p:cNvPr id="38" name="Text 35"/>
-          <p:cNvSpPr txBox="1"/>
-          <p:nvPr/>
-        </p:nvSpPr>
-        <p:spPr>
-          <a:xfrm>
-            <a:off x="1097280" y="4910328"/>
-            <a:ext cx="3657600" cy="457200"/>
+          <p:cNvPr id="42" name="Text 38"/>
+          <p:cNvSpPr txBox="1"/>
+          <p:nvPr/>
+        </p:nvSpPr>
+        <p:spPr>
+          <a:xfrm>
+            <a:off x="1097280" y="5413248"/>
+            <a:ext cx="3657600" cy="420624"/>
           </a:xfrm>
           <a:prstGeom prst="rect">
             <a:avLst/>
@@ -2348,14 +2510,14 @@
       </p:sp>
       <p:sp>
         <p:nvSpPr>
-          <p:cNvPr id="39" name="Text 36"/>
-          <p:cNvSpPr txBox="1"/>
-          <p:nvPr/>
-        </p:nvSpPr>
-        <p:spPr>
-          <a:xfrm>
-            <a:off x="4663440" y="4910328"/>
-            <a:ext cx="2240280" cy="457200"/>
+          <p:cNvPr id="43" name="Text 39"/>
+          <p:cNvSpPr txBox="1"/>
+          <p:nvPr/>
+        </p:nvSpPr>
+        <p:spPr>
+          <a:xfrm>
+            <a:off x="4663440" y="5413248"/>
+            <a:ext cx="2240280" cy="420624"/>
           </a:xfrm>
           <a:prstGeom prst="rect">
             <a:avLst/>
@@ -2387,18 +2549,18 @@
       </p:sp>
       <p:sp>
         <p:nvSpPr>
-          <p:cNvPr id="40" name="Shape 37"/>
+          <p:cNvPr id="44" name="Shape 40"/>
           <p:cNvSpPr/>
           <p:nvPr/>
         </p:nvSpPr>
         <p:spPr>
           <a:xfrm>
-            <a:off x="548640" y="5431536"/>
-            <a:ext cx="6464808" cy="457200"/>
+            <a:off x="548640" y="5888736"/>
+            <a:ext cx="6464808" cy="420624"/>
           </a:xfrm>
           <a:prstGeom prst="roundRect">
             <a:avLst>
-              <a:gd name="adj" fmla="val 30000"/>
+              <a:gd name="adj" fmla="val 32609"/>
             </a:avLst>
           </a:prstGeom>
           <a:solidFill>
@@ -2414,13 +2576,13 @@
       </p:sp>
       <p:sp>
         <p:nvSpPr>
-          <p:cNvPr id="41" name="Shape 38"/>
+          <p:cNvPr id="45" name="Shape 41"/>
           <p:cNvSpPr/>
           <p:nvPr/>
         </p:nvSpPr>
         <p:spPr>
           <a:xfrm>
-            <a:off x="640080" y="5495544"/>
+            <a:off x="640080" y="5934456"/>
             <a:ext cx="329184" cy="329184"/>
           </a:xfrm>
           <a:prstGeom prst="ellipse">
@@ -2439,13 +2601,13 @@
       </p:sp>
       <p:sp>
         <p:nvSpPr>
-          <p:cNvPr id="42" name="Text 39"/>
-          <p:cNvSpPr txBox="1"/>
-          <p:nvPr/>
-        </p:nvSpPr>
-        <p:spPr>
-          <a:xfrm>
-            <a:off x="640080" y="5495544"/>
+          <p:cNvPr id="46" name="Text 42"/>
+          <p:cNvSpPr txBox="1"/>
+          <p:nvPr/>
+        </p:nvSpPr>
+        <p:spPr>
+          <a:xfrm>
+            <a:off x="640080" y="5934456"/>
             <a:ext cx="329184" cy="329184"/>
           </a:xfrm>
           <a:prstGeom prst="rect">
@@ -2478,14 +2640,14 @@
       </p:sp>
       <p:sp>
         <p:nvSpPr>
-          <p:cNvPr id="43" name="Text 40"/>
-          <p:cNvSpPr txBox="1"/>
-          <p:nvPr/>
-        </p:nvSpPr>
-        <p:spPr>
-          <a:xfrm>
-            <a:off x="1097280" y="5431536"/>
-            <a:ext cx="3657600" cy="457200"/>
+          <p:cNvPr id="47" name="Text 43"/>
+          <p:cNvSpPr txBox="1"/>
+          <p:nvPr/>
+        </p:nvSpPr>
+        <p:spPr>
+          <a:xfrm>
+            <a:off x="1097280" y="5888736"/>
+            <a:ext cx="3657600" cy="420624"/>
           </a:xfrm>
           <a:prstGeom prst="rect">
             <a:avLst/>
@@ -2517,14 +2679,14 @@
       </p:sp>
       <p:sp>
         <p:nvSpPr>
-          <p:cNvPr id="44" name="Text 41"/>
-          <p:cNvSpPr txBox="1"/>
-          <p:nvPr/>
-        </p:nvSpPr>
-        <p:spPr>
-          <a:xfrm>
-            <a:off x="4663440" y="5431536"/>
-            <a:ext cx="2240280" cy="457200"/>
+          <p:cNvPr id="48" name="Text 44"/>
+          <p:cNvSpPr txBox="1"/>
+          <p:nvPr/>
+        </p:nvSpPr>
+        <p:spPr>
+          <a:xfrm>
+            <a:off x="4663440" y="5888736"/>
+            <a:ext cx="2240280" cy="420624"/>
           </a:xfrm>
           <a:prstGeom prst="rect">
             <a:avLst/>
@@ -2556,18 +2718,18 @@
       </p:sp>
       <p:sp>
         <p:nvSpPr>
-          <p:cNvPr id="45" name="Shape 42"/>
+          <p:cNvPr id="49" name="Shape 45"/>
           <p:cNvSpPr/>
           <p:nvPr/>
         </p:nvSpPr>
         <p:spPr>
           <a:xfrm>
-            <a:off x="548640" y="5952744"/>
-            <a:ext cx="6464808" cy="457200"/>
+            <a:off x="548640" y="6364224"/>
+            <a:ext cx="6464808" cy="420624"/>
           </a:xfrm>
           <a:prstGeom prst="roundRect">
             <a:avLst>
-              <a:gd name="adj" fmla="val 30000"/>
+              <a:gd name="adj" fmla="val 32609"/>
             </a:avLst>
           </a:prstGeom>
           <a:solidFill>
@@ -2583,13 +2745,13 @@
       </p:sp>
       <p:sp>
         <p:nvSpPr>
-          <p:cNvPr id="46" name="Shape 43"/>
+          <p:cNvPr id="50" name="Shape 46"/>
           <p:cNvSpPr/>
           <p:nvPr/>
         </p:nvSpPr>
         <p:spPr>
           <a:xfrm>
-            <a:off x="640080" y="6016752"/>
+            <a:off x="640080" y="6409944"/>
             <a:ext cx="329184" cy="329184"/>
           </a:xfrm>
           <a:prstGeom prst="ellipse">
@@ -2608,13 +2770,13 @@
       </p:sp>
       <p:sp>
         <p:nvSpPr>
-          <p:cNvPr id="47" name="Text 44"/>
-          <p:cNvSpPr txBox="1"/>
-          <p:nvPr/>
-        </p:nvSpPr>
-        <p:spPr>
-          <a:xfrm>
-            <a:off x="640080" y="6016752"/>
+          <p:cNvPr id="51" name="Text 47"/>
+          <p:cNvSpPr txBox="1"/>
+          <p:nvPr/>
+        </p:nvSpPr>
+        <p:spPr>
+          <a:xfrm>
+            <a:off x="640080" y="6409944"/>
             <a:ext cx="329184" cy="329184"/>
           </a:xfrm>
           <a:prstGeom prst="rect">
@@ -2647,14 +2809,14 @@
       </p:sp>
       <p:sp>
         <p:nvSpPr>
-          <p:cNvPr id="48" name="Text 45"/>
-          <p:cNvSpPr txBox="1"/>
-          <p:nvPr/>
-        </p:nvSpPr>
-        <p:spPr>
-          <a:xfrm>
-            <a:off x="1097280" y="5952744"/>
-            <a:ext cx="3657600" cy="457200"/>
+          <p:cNvPr id="52" name="Text 48"/>
+          <p:cNvSpPr txBox="1"/>
+          <p:nvPr/>
+        </p:nvSpPr>
+        <p:spPr>
+          <a:xfrm>
+            <a:off x="1097280" y="6364224"/>
+            <a:ext cx="3657600" cy="420624"/>
           </a:xfrm>
           <a:prstGeom prst="rect">
             <a:avLst/>
@@ -2686,14 +2848,14 @@
       </p:sp>
       <p:sp>
         <p:nvSpPr>
-          <p:cNvPr id="49" name="Text 46"/>
-          <p:cNvSpPr txBox="1"/>
-          <p:nvPr/>
-        </p:nvSpPr>
-        <p:spPr>
-          <a:xfrm>
-            <a:off x="4663440" y="5952744"/>
-            <a:ext cx="2240280" cy="457200"/>
+          <p:cNvPr id="53" name="Text 49"/>
+          <p:cNvSpPr txBox="1"/>
+          <p:nvPr/>
+        </p:nvSpPr>
+        <p:spPr>
+          <a:xfrm>
+            <a:off x="4663440" y="6364224"/>
+            <a:ext cx="2240280" cy="420624"/>
           </a:xfrm>
           <a:prstGeom prst="rect">
             <a:avLst/>
@@ -2725,18 +2887,18 @@
       </p:sp>
       <p:sp>
         <p:nvSpPr>
-          <p:cNvPr id="50" name="Shape 47"/>
+          <p:cNvPr id="54" name="Shape 50"/>
           <p:cNvSpPr/>
           <p:nvPr/>
         </p:nvSpPr>
         <p:spPr>
           <a:xfrm>
-            <a:off x="548640" y="6473952"/>
-            <a:ext cx="6464808" cy="457200"/>
+            <a:off x="548640" y="6839712"/>
+            <a:ext cx="6464808" cy="420624"/>
           </a:xfrm>
           <a:prstGeom prst="roundRect">
             <a:avLst>
-              <a:gd name="adj" fmla="val 30000"/>
+              <a:gd name="adj" fmla="val 32609"/>
             </a:avLst>
           </a:prstGeom>
           <a:solidFill>
@@ -2752,13 +2914,13 @@
       </p:sp>
       <p:sp>
         <p:nvSpPr>
-          <p:cNvPr id="51" name="Shape 48"/>
+          <p:cNvPr id="55" name="Shape 51"/>
           <p:cNvSpPr/>
           <p:nvPr/>
         </p:nvSpPr>
         <p:spPr>
           <a:xfrm>
-            <a:off x="640080" y="6537960"/>
+            <a:off x="640080" y="6885432"/>
             <a:ext cx="329184" cy="329184"/>
           </a:xfrm>
           <a:prstGeom prst="ellipse">
@@ -2777,13 +2939,13 @@
       </p:sp>
       <p:sp>
         <p:nvSpPr>
-          <p:cNvPr id="52" name="Text 49"/>
-          <p:cNvSpPr txBox="1"/>
-          <p:nvPr/>
-        </p:nvSpPr>
-        <p:spPr>
-          <a:xfrm>
-            <a:off x="640080" y="6537960"/>
+          <p:cNvPr id="56" name="Text 52"/>
+          <p:cNvSpPr txBox="1"/>
+          <p:nvPr/>
+        </p:nvSpPr>
+        <p:spPr>
+          <a:xfrm>
+            <a:off x="640080" y="6885432"/>
             <a:ext cx="329184" cy="329184"/>
           </a:xfrm>
           <a:prstGeom prst="rect">
@@ -2816,14 +2978,14 @@
       </p:sp>
       <p:sp>
         <p:nvSpPr>
-          <p:cNvPr id="53" name="Text 50"/>
-          <p:cNvSpPr txBox="1"/>
-          <p:nvPr/>
-        </p:nvSpPr>
-        <p:spPr>
-          <a:xfrm>
-            <a:off x="1097280" y="6473952"/>
-            <a:ext cx="3657600" cy="457200"/>
+          <p:cNvPr id="57" name="Text 53"/>
+          <p:cNvSpPr txBox="1"/>
+          <p:nvPr/>
+        </p:nvSpPr>
+        <p:spPr>
+          <a:xfrm>
+            <a:off x="1097280" y="6839712"/>
+            <a:ext cx="3657600" cy="420624"/>
           </a:xfrm>
           <a:prstGeom prst="rect">
             <a:avLst/>
@@ -2855,14 +3017,14 @@
       </p:sp>
       <p:sp>
         <p:nvSpPr>
-          <p:cNvPr id="54" name="Text 51"/>
-          <p:cNvSpPr txBox="1"/>
-          <p:nvPr/>
-        </p:nvSpPr>
-        <p:spPr>
-          <a:xfrm>
-            <a:off x="4663440" y="6473952"/>
-            <a:ext cx="2240280" cy="457200"/>
+          <p:cNvPr id="58" name="Text 54"/>
+          <p:cNvSpPr txBox="1"/>
+          <p:nvPr/>
+        </p:nvSpPr>
+        <p:spPr>
+          <a:xfrm>
+            <a:off x="4663440" y="6839712"/>
+            <a:ext cx="2240280" cy="420624"/>
           </a:xfrm>
           <a:prstGeom prst="rect">
             <a:avLst/>
@@ -2894,18 +3056,18 @@
       </p:sp>
       <p:sp>
         <p:nvSpPr>
-          <p:cNvPr id="55" name="Shape 52"/>
+          <p:cNvPr id="59" name="Shape 55"/>
           <p:cNvSpPr/>
           <p:nvPr/>
         </p:nvSpPr>
         <p:spPr>
           <a:xfrm>
-            <a:off x="548640" y="6995160"/>
-            <a:ext cx="6464808" cy="457200"/>
+            <a:off x="548640" y="7315200"/>
+            <a:ext cx="6464808" cy="420624"/>
           </a:xfrm>
           <a:prstGeom prst="roundRect">
             <a:avLst>
-              <a:gd name="adj" fmla="val 30000"/>
+              <a:gd name="adj" fmla="val 32609"/>
             </a:avLst>
           </a:prstGeom>
           <a:solidFill>
@@ -2921,13 +3083,13 @@
       </p:sp>
       <p:sp>
         <p:nvSpPr>
-          <p:cNvPr id="56" name="Shape 53"/>
+          <p:cNvPr id="60" name="Shape 56"/>
           <p:cNvSpPr/>
           <p:nvPr/>
         </p:nvSpPr>
         <p:spPr>
           <a:xfrm>
-            <a:off x="640080" y="7059168"/>
+            <a:off x="640080" y="7360920"/>
             <a:ext cx="329184" cy="329184"/>
           </a:xfrm>
           <a:prstGeom prst="ellipse">
@@ -2946,13 +3108,13 @@
       </p:sp>
       <p:sp>
         <p:nvSpPr>
-          <p:cNvPr id="57" name="Text 54"/>
-          <p:cNvSpPr txBox="1"/>
-          <p:nvPr/>
-        </p:nvSpPr>
-        <p:spPr>
-          <a:xfrm>
-            <a:off x="640080" y="7059168"/>
+          <p:cNvPr id="61" name="Text 57"/>
+          <p:cNvSpPr txBox="1"/>
+          <p:nvPr/>
+        </p:nvSpPr>
+        <p:spPr>
+          <a:xfrm>
+            <a:off x="640080" y="7360920"/>
             <a:ext cx="329184" cy="329184"/>
           </a:xfrm>
           <a:prstGeom prst="rect">
@@ -2985,14 +3147,14 @@
       </p:sp>
       <p:sp>
         <p:nvSpPr>
-          <p:cNvPr id="58" name="Text 55"/>
-          <p:cNvSpPr txBox="1"/>
-          <p:nvPr/>
-        </p:nvSpPr>
-        <p:spPr>
-          <a:xfrm>
-            <a:off x="1097280" y="6995160"/>
-            <a:ext cx="3657600" cy="457200"/>
+          <p:cNvPr id="62" name="Text 58"/>
+          <p:cNvSpPr txBox="1"/>
+          <p:nvPr/>
+        </p:nvSpPr>
+        <p:spPr>
+          <a:xfrm>
+            <a:off x="1097280" y="7315200"/>
+            <a:ext cx="3657600" cy="420624"/>
           </a:xfrm>
           <a:prstGeom prst="rect">
             <a:avLst/>
@@ -3024,14 +3186,14 @@
       </p:sp>
       <p:sp>
         <p:nvSpPr>
-          <p:cNvPr id="59" name="Text 56"/>
-          <p:cNvSpPr txBox="1"/>
-          <p:nvPr/>
-        </p:nvSpPr>
-        <p:spPr>
-          <a:xfrm>
-            <a:off x="4663440" y="6995160"/>
-            <a:ext cx="2240280" cy="457200"/>
+          <p:cNvPr id="63" name="Text 59"/>
+          <p:cNvSpPr txBox="1"/>
+          <p:nvPr/>
+        </p:nvSpPr>
+        <p:spPr>
+          <a:xfrm>
+            <a:off x="4663440" y="7315200"/>
+            <a:ext cx="2240280" cy="420624"/>
           </a:xfrm>
           <a:prstGeom prst="rect">
             <a:avLst/>
@@ -3063,18 +3225,18 @@
       </p:sp>
       <p:sp>
         <p:nvSpPr>
-          <p:cNvPr id="60" name="Shape 57"/>
+          <p:cNvPr id="64" name="Shape 60"/>
           <p:cNvSpPr/>
           <p:nvPr/>
         </p:nvSpPr>
         <p:spPr>
           <a:xfrm>
-            <a:off x="548640" y="7516368"/>
-            <a:ext cx="6464808" cy="457200"/>
+            <a:off x="548640" y="7790688"/>
+            <a:ext cx="6464808" cy="420624"/>
           </a:xfrm>
           <a:prstGeom prst="roundRect">
             <a:avLst>
-              <a:gd name="adj" fmla="val 30000"/>
+              <a:gd name="adj" fmla="val 32609"/>
             </a:avLst>
           </a:prstGeom>
           <a:solidFill>
@@ -3090,13 +3252,13 @@
       </p:sp>
       <p:sp>
         <p:nvSpPr>
-          <p:cNvPr id="61" name="Shape 58"/>
+          <p:cNvPr id="65" name="Shape 61"/>
           <p:cNvSpPr/>
           <p:nvPr/>
         </p:nvSpPr>
         <p:spPr>
           <a:xfrm>
-            <a:off x="640080" y="7580376"/>
+            <a:off x="640080" y="7836408"/>
             <a:ext cx="329184" cy="329184"/>
           </a:xfrm>
           <a:prstGeom prst="ellipse">
@@ -3115,13 +3277,13 @@
       </p:sp>
       <p:sp>
         <p:nvSpPr>
-          <p:cNvPr id="62" name="Text 59"/>
-          <p:cNvSpPr txBox="1"/>
-          <p:nvPr/>
-        </p:nvSpPr>
-        <p:spPr>
-          <a:xfrm>
-            <a:off x="640080" y="7580376"/>
+          <p:cNvPr id="66" name="Text 62"/>
+          <p:cNvSpPr txBox="1"/>
+          <p:nvPr/>
+        </p:nvSpPr>
+        <p:spPr>
+          <a:xfrm>
+            <a:off x="640080" y="7836408"/>
             <a:ext cx="329184" cy="329184"/>
           </a:xfrm>
           <a:prstGeom prst="rect">
@@ -3154,14 +3316,14 @@
       </p:sp>
       <p:sp>
         <p:nvSpPr>
-          <p:cNvPr id="63" name="Text 60"/>
-          <p:cNvSpPr txBox="1"/>
-          <p:nvPr/>
-        </p:nvSpPr>
-        <p:spPr>
-          <a:xfrm>
-            <a:off x="1097280" y="7516368"/>
-            <a:ext cx="3657600" cy="457200"/>
+          <p:cNvPr id="67" name="Text 63"/>
+          <p:cNvSpPr txBox="1"/>
+          <p:nvPr/>
+        </p:nvSpPr>
+        <p:spPr>
+          <a:xfrm>
+            <a:off x="1097280" y="7790688"/>
+            <a:ext cx="3657600" cy="420624"/>
           </a:xfrm>
           <a:prstGeom prst="rect">
             <a:avLst/>
@@ -3193,14 +3355,14 @@
       </p:sp>
       <p:sp>
         <p:nvSpPr>
-          <p:cNvPr id="64" name="Text 61"/>
-          <p:cNvSpPr txBox="1"/>
-          <p:nvPr/>
-        </p:nvSpPr>
-        <p:spPr>
-          <a:xfrm>
-            <a:off x="4663440" y="7516368"/>
-            <a:ext cx="2240280" cy="457200"/>
+          <p:cNvPr id="68" name="Text 64"/>
+          <p:cNvSpPr txBox="1"/>
+          <p:nvPr/>
+        </p:nvSpPr>
+        <p:spPr>
+          <a:xfrm>
+            <a:off x="4663440" y="7790688"/>
+            <a:ext cx="2240280" cy="420624"/>
           </a:xfrm>
           <a:prstGeom prst="rect">
             <a:avLst/>
@@ -3232,18 +3394,18 @@
       </p:sp>
       <p:sp>
         <p:nvSpPr>
-          <p:cNvPr id="65" name="Shape 62"/>
+          <p:cNvPr id="69" name="Shape 65"/>
           <p:cNvSpPr/>
           <p:nvPr/>
         </p:nvSpPr>
         <p:spPr>
           <a:xfrm>
-            <a:off x="548640" y="8037576"/>
-            <a:ext cx="6464808" cy="457200"/>
+            <a:off x="548640" y="8266176"/>
+            <a:ext cx="6464808" cy="420624"/>
           </a:xfrm>
           <a:prstGeom prst="roundRect">
             <a:avLst>
-              <a:gd name="adj" fmla="val 30000"/>
+              <a:gd name="adj" fmla="val 32609"/>
             </a:avLst>
           </a:prstGeom>
           <a:solidFill>
@@ -3259,13 +3421,13 @@
       </p:sp>
       <p:sp>
         <p:nvSpPr>
-          <p:cNvPr id="66" name="Shape 63"/>
+          <p:cNvPr id="70" name="Shape 66"/>
           <p:cNvSpPr/>
           <p:nvPr/>
         </p:nvSpPr>
         <p:spPr>
           <a:xfrm>
-            <a:off x="640080" y="8101584"/>
+            <a:off x="640080" y="8311896"/>
             <a:ext cx="329184" cy="329184"/>
           </a:xfrm>
           <a:prstGeom prst="ellipse">
@@ -3284,13 +3446,13 @@
       </p:sp>
       <p:sp>
         <p:nvSpPr>
-          <p:cNvPr id="67" name="Text 64"/>
-          <p:cNvSpPr txBox="1"/>
-          <p:nvPr/>
-        </p:nvSpPr>
-        <p:spPr>
-          <a:xfrm>
-            <a:off x="640080" y="8101584"/>
+          <p:cNvPr id="71" name="Text 67"/>
+          <p:cNvSpPr txBox="1"/>
+          <p:nvPr/>
+        </p:nvSpPr>
+        <p:spPr>
+          <a:xfrm>
+            <a:off x="640080" y="8311896"/>
             <a:ext cx="329184" cy="329184"/>
           </a:xfrm>
           <a:prstGeom prst="rect">
@@ -3323,14 +3485,14 @@
       </p:sp>
       <p:sp>
         <p:nvSpPr>
-          <p:cNvPr id="68" name="Text 65"/>
-          <p:cNvSpPr txBox="1"/>
-          <p:nvPr/>
-        </p:nvSpPr>
-        <p:spPr>
-          <a:xfrm>
-            <a:off x="1097280" y="8037576"/>
-            <a:ext cx="3657600" cy="457200"/>
+          <p:cNvPr id="72" name="Text 68"/>
+          <p:cNvSpPr txBox="1"/>
+          <p:nvPr/>
+        </p:nvSpPr>
+        <p:spPr>
+          <a:xfrm>
+            <a:off x="1097280" y="8266176"/>
+            <a:ext cx="3657600" cy="420624"/>
           </a:xfrm>
           <a:prstGeom prst="rect">
             <a:avLst/>
@@ -3362,14 +3524,14 @@
       </p:sp>
       <p:sp>
         <p:nvSpPr>
-          <p:cNvPr id="69" name="Text 66"/>
-          <p:cNvSpPr txBox="1"/>
-          <p:nvPr/>
-        </p:nvSpPr>
-        <p:spPr>
-          <a:xfrm>
-            <a:off x="4663440" y="8037576"/>
-            <a:ext cx="2240280" cy="457200"/>
+          <p:cNvPr id="73" name="Text 69"/>
+          <p:cNvSpPr txBox="1"/>
+          <p:nvPr/>
+        </p:nvSpPr>
+        <p:spPr>
+          <a:xfrm>
+            <a:off x="4663440" y="8266176"/>
+            <a:ext cx="2240280" cy="420624"/>
           </a:xfrm>
           <a:prstGeom prst="rect">
             <a:avLst/>
@@ -3401,18 +3563,18 @@
       </p:sp>
       <p:sp>
         <p:nvSpPr>
-          <p:cNvPr id="70" name="Shape 67"/>
+          <p:cNvPr id="74" name="Shape 70"/>
           <p:cNvSpPr/>
           <p:nvPr/>
         </p:nvSpPr>
         <p:spPr>
           <a:xfrm>
-            <a:off x="548640" y="8558784"/>
-            <a:ext cx="6464808" cy="457200"/>
+            <a:off x="548640" y="8741664"/>
+            <a:ext cx="6464808" cy="420624"/>
           </a:xfrm>
           <a:prstGeom prst="roundRect">
             <a:avLst>
-              <a:gd name="adj" fmla="val 30000"/>
+              <a:gd name="adj" fmla="val 32609"/>
             </a:avLst>
           </a:prstGeom>
           <a:solidFill>
@@ -3428,13 +3590,13 @@
       </p:sp>
       <p:sp>
         <p:nvSpPr>
-          <p:cNvPr id="71" name="Shape 68"/>
+          <p:cNvPr id="75" name="Shape 71"/>
           <p:cNvSpPr/>
           <p:nvPr/>
         </p:nvSpPr>
         <p:spPr>
           <a:xfrm>
-            <a:off x="640080" y="8622792"/>
+            <a:off x="640080" y="8787384"/>
             <a:ext cx="329184" cy="329184"/>
           </a:xfrm>
           <a:prstGeom prst="ellipse">
@@ -3453,13 +3615,13 @@
       </p:sp>
       <p:sp>
         <p:nvSpPr>
-          <p:cNvPr id="72" name="Text 69"/>
-          <p:cNvSpPr txBox="1"/>
-          <p:nvPr/>
-        </p:nvSpPr>
-        <p:spPr>
-          <a:xfrm>
-            <a:off x="640080" y="8622792"/>
+          <p:cNvPr id="76" name="Text 72"/>
+          <p:cNvSpPr txBox="1"/>
+          <p:nvPr/>
+        </p:nvSpPr>
+        <p:spPr>
+          <a:xfrm>
+            <a:off x="640080" y="8787384"/>
             <a:ext cx="329184" cy="329184"/>
           </a:xfrm>
           <a:prstGeom prst="rect">
@@ -3492,14 +3654,14 @@
       </p:sp>
       <p:sp>
         <p:nvSpPr>
-          <p:cNvPr id="73" name="Text 70"/>
-          <p:cNvSpPr txBox="1"/>
-          <p:nvPr/>
-        </p:nvSpPr>
-        <p:spPr>
-          <a:xfrm>
-            <a:off x="1097280" y="8558784"/>
-            <a:ext cx="3657600" cy="457200"/>
+          <p:cNvPr id="77" name="Text 73"/>
+          <p:cNvSpPr txBox="1"/>
+          <p:nvPr/>
+        </p:nvSpPr>
+        <p:spPr>
+          <a:xfrm>
+            <a:off x="1097280" y="8741664"/>
+            <a:ext cx="3657600" cy="420624"/>
           </a:xfrm>
           <a:prstGeom prst="rect">
             <a:avLst/>
@@ -3531,14 +3693,14 @@
       </p:sp>
       <p:sp>
         <p:nvSpPr>
-          <p:cNvPr id="74" name="Text 71"/>
-          <p:cNvSpPr txBox="1"/>
-          <p:nvPr/>
-        </p:nvSpPr>
-        <p:spPr>
-          <a:xfrm>
-            <a:off x="4663440" y="8558784"/>
-            <a:ext cx="2240280" cy="457200"/>
+          <p:cNvPr id="78" name="Text 74"/>
+          <p:cNvSpPr txBox="1"/>
+          <p:nvPr/>
+        </p:nvSpPr>
+        <p:spPr>
+          <a:xfrm>
+            <a:off x="4663440" y="8741664"/>
+            <a:ext cx="2240280" cy="420624"/>
           </a:xfrm>
           <a:prstGeom prst="rect">
             <a:avLst/>
@@ -3570,18 +3732,18 @@
       </p:sp>
       <p:sp>
         <p:nvSpPr>
-          <p:cNvPr id="75" name="Shape 72"/>
+          <p:cNvPr id="79" name="Shape 75"/>
           <p:cNvSpPr/>
           <p:nvPr/>
         </p:nvSpPr>
         <p:spPr>
           <a:xfrm>
-            <a:off x="548640" y="9079992"/>
-            <a:ext cx="6464808" cy="457200"/>
+            <a:off x="548640" y="9217152"/>
+            <a:ext cx="6464808" cy="420624"/>
           </a:xfrm>
           <a:prstGeom prst="roundRect">
             <a:avLst>
-              <a:gd name="adj" fmla="val 30000"/>
+              <a:gd name="adj" fmla="val 32609"/>
             </a:avLst>
           </a:prstGeom>
           <a:solidFill>
@@ -3597,13 +3759,13 @@
       </p:sp>
       <p:sp>
         <p:nvSpPr>
-          <p:cNvPr id="76" name="Shape 73"/>
+          <p:cNvPr id="80" name="Shape 76"/>
           <p:cNvSpPr/>
           <p:nvPr/>
         </p:nvSpPr>
         <p:spPr>
           <a:xfrm>
-            <a:off x="640080" y="9144000"/>
+            <a:off x="640080" y="9262872"/>
             <a:ext cx="329184" cy="329184"/>
           </a:xfrm>
           <a:prstGeom prst="ellipse">
@@ -3622,13 +3784,13 @@
       </p:sp>
       <p:sp>
         <p:nvSpPr>
-          <p:cNvPr id="77" name="Text 74"/>
-          <p:cNvSpPr txBox="1"/>
-          <p:nvPr/>
-        </p:nvSpPr>
-        <p:spPr>
-          <a:xfrm>
-            <a:off x="640080" y="9144000"/>
+          <p:cNvPr id="81" name="Text 77"/>
+          <p:cNvSpPr txBox="1"/>
+          <p:nvPr/>
+        </p:nvSpPr>
+        <p:spPr>
+          <a:xfrm>
+            <a:off x="640080" y="9262872"/>
             <a:ext cx="329184" cy="329184"/>
           </a:xfrm>
           <a:prstGeom prst="rect">
@@ -3661,14 +3823,14 @@
       </p:sp>
       <p:sp>
         <p:nvSpPr>
-          <p:cNvPr id="78" name="Text 75"/>
-          <p:cNvSpPr txBox="1"/>
-          <p:nvPr/>
-        </p:nvSpPr>
-        <p:spPr>
-          <a:xfrm>
-            <a:off x="1097280" y="9079992"/>
-            <a:ext cx="3657600" cy="457200"/>
+          <p:cNvPr id="82" name="Text 78"/>
+          <p:cNvSpPr txBox="1"/>
+          <p:nvPr/>
+        </p:nvSpPr>
+        <p:spPr>
+          <a:xfrm>
+            <a:off x="1097280" y="9217152"/>
+            <a:ext cx="3657600" cy="420624"/>
           </a:xfrm>
           <a:prstGeom prst="rect">
             <a:avLst/>
@@ -3700,14 +3862,14 @@
       </p:sp>
       <p:sp>
         <p:nvSpPr>
-          <p:cNvPr id="79" name="Text 76"/>
-          <p:cNvSpPr txBox="1"/>
-          <p:nvPr/>
-        </p:nvSpPr>
-        <p:spPr>
-          <a:xfrm>
-            <a:off x="4663440" y="9079992"/>
-            <a:ext cx="2240280" cy="457200"/>
+          <p:cNvPr id="83" name="Text 79"/>
+          <p:cNvSpPr txBox="1"/>
+          <p:nvPr/>
+        </p:nvSpPr>
+        <p:spPr>
+          <a:xfrm>
+            <a:off x="4663440" y="9217152"/>
+            <a:ext cx="2240280" cy="420624"/>
           </a:xfrm>
           <a:prstGeom prst="rect">
             <a:avLst/>
@@ -3739,18 +3901,18 @@
       </p:sp>
       <p:sp>
         <p:nvSpPr>
-          <p:cNvPr id="80" name="Shape 77"/>
+          <p:cNvPr id="84" name="Shape 80"/>
           <p:cNvSpPr/>
           <p:nvPr/>
         </p:nvSpPr>
         <p:spPr>
           <a:xfrm>
-            <a:off x="548640" y="9601200"/>
-            <a:ext cx="6464808" cy="457200"/>
+            <a:off x="548640" y="9692640"/>
+            <a:ext cx="6464808" cy="420624"/>
           </a:xfrm>
           <a:prstGeom prst="roundRect">
             <a:avLst>
-              <a:gd name="adj" fmla="val 30000"/>
+              <a:gd name="adj" fmla="val 32609"/>
             </a:avLst>
           </a:prstGeom>
           <a:solidFill>
@@ -3766,13 +3928,13 @@
       </p:sp>
       <p:sp>
         <p:nvSpPr>
-          <p:cNvPr id="81" name="Shape 78"/>
+          <p:cNvPr id="85" name="Shape 81"/>
           <p:cNvSpPr/>
           <p:nvPr/>
         </p:nvSpPr>
         <p:spPr>
           <a:xfrm>
-            <a:off x="640080" y="9665208"/>
+            <a:off x="640080" y="9738360"/>
             <a:ext cx="329184" cy="329184"/>
           </a:xfrm>
           <a:prstGeom prst="ellipse">
@@ -3791,13 +3953,13 @@
       </p:sp>
       <p:sp>
         <p:nvSpPr>
-          <p:cNvPr id="82" name="Text 79"/>
-          <p:cNvSpPr txBox="1"/>
-          <p:nvPr/>
-        </p:nvSpPr>
-        <p:spPr>
-          <a:xfrm>
-            <a:off x="640080" y="9665208"/>
+          <p:cNvPr id="86" name="Text 82"/>
+          <p:cNvSpPr txBox="1"/>
+          <p:nvPr/>
+        </p:nvSpPr>
+        <p:spPr>
+          <a:xfrm>
+            <a:off x="640080" y="9738360"/>
             <a:ext cx="329184" cy="329184"/>
           </a:xfrm>
           <a:prstGeom prst="rect">
@@ -3830,14 +3992,14 @@
       </p:sp>
       <p:sp>
         <p:nvSpPr>
-          <p:cNvPr id="83" name="Text 80"/>
-          <p:cNvSpPr txBox="1"/>
-          <p:nvPr/>
-        </p:nvSpPr>
-        <p:spPr>
-          <a:xfrm>
-            <a:off x="1097280" y="9601200"/>
-            <a:ext cx="3657600" cy="457200"/>
+          <p:cNvPr id="87" name="Text 83"/>
+          <p:cNvSpPr txBox="1"/>
+          <p:nvPr/>
+        </p:nvSpPr>
+        <p:spPr>
+          <a:xfrm>
+            <a:off x="1097280" y="9692640"/>
+            <a:ext cx="3657600" cy="420624"/>
           </a:xfrm>
           <a:prstGeom prst="rect">
             <a:avLst/>
@@ -3869,14 +4031,14 @@
       </p:sp>
       <p:sp>
         <p:nvSpPr>
-          <p:cNvPr id="84" name="Text 81"/>
-          <p:cNvSpPr txBox="1"/>
-          <p:nvPr/>
-        </p:nvSpPr>
-        <p:spPr>
-          <a:xfrm>
-            <a:off x="4663440" y="9601200"/>
-            <a:ext cx="2240280" cy="457200"/>
+          <p:cNvPr id="88" name="Text 84"/>
+          <p:cNvSpPr txBox="1"/>
+          <p:nvPr/>
+        </p:nvSpPr>
+        <p:spPr>
+          <a:xfrm>
+            <a:off x="4663440" y="9692640"/>
+            <a:ext cx="2240280" cy="420624"/>
           </a:xfrm>
           <a:prstGeom prst="rect">
             <a:avLst/>

--- a/videoslides/arbeitsblatt-textgleichungen-loesungen-a4.pptx
+++ b/videoslides/arbeitsblatt-textgleichungen-loesungen-a4.pptx
@@ -1084,62 +1084,9 @@
           <a:chExt cx="0" cy="0"/>
         </a:xfrm>
       </p:grpSpPr>
-      <p:sp>
-        <p:nvSpPr>
-          <p:cNvPr id="3" name="Text 0"/>
-          <p:cNvSpPr txBox="1"/>
-          <p:nvPr/>
-        </p:nvSpPr>
-        <p:spPr>
-          <a:xfrm>
-            <a:off x="548640" y="274320"/>
-            <a:ext cx="2926080" cy="731520"/>
-          </a:xfrm>
-          <a:prstGeom prst="rect">
-            <a:avLst/>
-          </a:prstGeom>
-          <a:noFill/>
-          <a:ln/>
-        </p:spPr>
-        <p:txBody>
-          <a:bodyPr wrap="square" lIns="0" tIns="0" rIns="0" bIns="0" rtlCol="0" anchor="ctr"/>
-          <a:lstStyle/>
-          <a:p>
-            <a:pPr indent="0" marL="0">
-              <a:buNone/>
-            </a:pPr>
-            <a:r>
-              <a:rPr lang="en-US" sz="3000" b="1" dirty="0">
-                <a:solidFill>
-                  <a:srgbClr val="475BA6"/>
-                </a:solidFill>
-                <a:latin typeface="Poppins" pitchFamily="34" charset="0"/>
-                <a:ea typeface="Poppins" pitchFamily="34" charset="-122"/>
-                <a:cs typeface="Poppins" pitchFamily="34" charset="-120"/>
-              </a:rPr>
-              <a:t>clever</a:t>
-            </a:r>
-            <a:pPr indent="0" marL="0">
-              <a:buNone/>
-            </a:pPr>
-            <a:r>
-              <a:rPr lang="en-US" sz="3000" b="1" dirty="0">
-                <a:solidFill>
-                  <a:srgbClr val="36448A"/>
-                </a:solidFill>
-                <a:latin typeface="Poppins" pitchFamily="34" charset="0"/>
-                <a:ea typeface="Poppins" pitchFamily="34" charset="-122"/>
-                <a:cs typeface="Poppins" pitchFamily="34" charset="-120"/>
-              </a:rPr>
-              <a:t>box</a:t>
-            </a:r>
-            <a:endParaRPr lang="en-US" sz="3000" dirty="0"/>
-          </a:p>
-        </p:txBody>
-      </p:sp>
       <p:pic>
         <p:nvPicPr>
-          <p:cNvPr id="4" name="Image 0" descr="QR-Code zu www.cleverbox.co.at">    </p:cNvPr>
+          <p:cNvPr id="3" name="Image 0" descr="cleverbox – modern. kostenlos. lehrreich.">    </p:cNvPr>
           <p:cNvPicPr>
             <a:picLocks noChangeAspect="1"/>
           </p:cNvPicPr>
@@ -1153,6 +1100,30 @@
         </p:blipFill>
         <p:spPr>
           <a:xfrm>
+            <a:off x="548640" y="201168"/>
+            <a:ext cx="2331720" cy="864835"/>
+          </a:xfrm>
+          <a:prstGeom prst="rect">
+            <a:avLst/>
+          </a:prstGeom>
+        </p:spPr>
+      </p:pic>
+      <p:pic>
+        <p:nvPicPr>
+          <p:cNvPr id="4" name="Image 1" descr="QR-Code zu www.cleverbox.co.at">    </p:cNvPr>
+          <p:cNvPicPr>
+            <a:picLocks noChangeAspect="1"/>
+          </p:cNvPicPr>
+          <p:nvPr/>
+        </p:nvPicPr>
+        <p:blipFill>
+          <a:blip r:embed="rId2"/>
+          <a:stretch>
+            <a:fillRect/>
+          </a:stretch>
+        </p:blipFill>
+        <p:spPr>
+          <a:xfrm>
             <a:off x="6144768" y="228600"/>
             <a:ext cx="868680" cy="868680"/>
           </a:xfrm>
@@ -1163,7 +1134,7 @@
       </p:pic>
       <p:sp>
         <p:nvSpPr>
-          <p:cNvPr id="5" name="Text 1"/>
+          <p:cNvPr id="5" name="Text 0"/>
           <p:cNvSpPr txBox="1"/>
           <p:nvPr/>
         </p:nvSpPr>
@@ -1225,7 +1196,7 @@
       </p:sp>
       <p:sp>
         <p:nvSpPr>
-          <p:cNvPr id="6" name="Shape 2"/>
+          <p:cNvPr id="6" name="Shape 1"/>
           <p:cNvSpPr/>
           <p:nvPr/>
         </p:nvSpPr>
@@ -1248,7 +1219,7 @@
       </p:sp>
       <p:sp>
         <p:nvSpPr>
-          <p:cNvPr id="7" name="Text 3"/>
+          <p:cNvPr id="7" name="Text 2"/>
           <p:cNvSpPr txBox="1"/>
           <p:nvPr/>
         </p:nvSpPr>
@@ -1287,7 +1258,7 @@
       </p:sp>
       <p:sp>
         <p:nvSpPr>
-          <p:cNvPr id="8" name="Text 4"/>
+          <p:cNvPr id="8" name="Text 3"/>
           <p:cNvSpPr txBox="1"/>
           <p:nvPr/>
         </p:nvSpPr>
@@ -1366,7 +1337,7 @@
       </p:sp>
       <p:sp>
         <p:nvSpPr>
-          <p:cNvPr id="9" name="Shape 5"/>
+          <p:cNvPr id="9" name="Shape 4"/>
           <p:cNvSpPr/>
           <p:nvPr/>
         </p:nvSpPr>
@@ -1393,7 +1364,7 @@
       </p:sp>
       <p:sp>
         <p:nvSpPr>
-          <p:cNvPr id="10" name="Shape 6"/>
+          <p:cNvPr id="10" name="Shape 5"/>
           <p:cNvSpPr/>
           <p:nvPr/>
         </p:nvSpPr>
@@ -1418,7 +1389,7 @@
       </p:sp>
       <p:sp>
         <p:nvSpPr>
-          <p:cNvPr id="11" name="Text 7"/>
+          <p:cNvPr id="11" name="Text 6"/>
           <p:cNvSpPr txBox="1"/>
           <p:nvPr/>
         </p:nvSpPr>
@@ -1457,7 +1428,7 @@
       </p:sp>
       <p:sp>
         <p:nvSpPr>
-          <p:cNvPr id="12" name="Text 8"/>
+          <p:cNvPr id="12" name="Text 7"/>
           <p:cNvSpPr txBox="1"/>
           <p:nvPr/>
         </p:nvSpPr>
@@ -1496,7 +1467,7 @@
       </p:sp>
       <p:sp>
         <p:nvSpPr>
-          <p:cNvPr id="13" name="Text 9"/>
+          <p:cNvPr id="13" name="Text 8"/>
           <p:cNvSpPr txBox="1"/>
           <p:nvPr/>
         </p:nvSpPr>
@@ -1535,7 +1506,7 @@
       </p:sp>
       <p:sp>
         <p:nvSpPr>
-          <p:cNvPr id="14" name="Shape 10"/>
+          <p:cNvPr id="14" name="Shape 9"/>
           <p:cNvSpPr/>
           <p:nvPr/>
         </p:nvSpPr>
@@ -1562,7 +1533,7 @@
       </p:sp>
       <p:sp>
         <p:nvSpPr>
-          <p:cNvPr id="15" name="Shape 11"/>
+          <p:cNvPr id="15" name="Shape 10"/>
           <p:cNvSpPr/>
           <p:nvPr/>
         </p:nvSpPr>
@@ -1587,7 +1558,7 @@
       </p:sp>
       <p:sp>
         <p:nvSpPr>
-          <p:cNvPr id="16" name="Text 12"/>
+          <p:cNvPr id="16" name="Text 11"/>
           <p:cNvSpPr txBox="1"/>
           <p:nvPr/>
         </p:nvSpPr>
@@ -1626,7 +1597,7 @@
       </p:sp>
       <p:sp>
         <p:nvSpPr>
-          <p:cNvPr id="17" name="Text 13"/>
+          <p:cNvPr id="17" name="Text 12"/>
           <p:cNvSpPr txBox="1"/>
           <p:nvPr/>
         </p:nvSpPr>
@@ -1665,7 +1636,7 @@
       </p:sp>
       <p:sp>
         <p:nvSpPr>
-          <p:cNvPr id="18" name="Text 14"/>
+          <p:cNvPr id="18" name="Text 13"/>
           <p:cNvSpPr txBox="1"/>
           <p:nvPr/>
         </p:nvSpPr>
@@ -1704,7 +1675,7 @@
       </p:sp>
       <p:sp>
         <p:nvSpPr>
-          <p:cNvPr id="19" name="Shape 15"/>
+          <p:cNvPr id="19" name="Shape 14"/>
           <p:cNvSpPr/>
           <p:nvPr/>
         </p:nvSpPr>
@@ -1731,7 +1702,7 @@
       </p:sp>
       <p:sp>
         <p:nvSpPr>
-          <p:cNvPr id="20" name="Shape 16"/>
+          <p:cNvPr id="20" name="Shape 15"/>
           <p:cNvSpPr/>
           <p:nvPr/>
         </p:nvSpPr>
@@ -1756,7 +1727,7 @@
       </p:sp>
       <p:sp>
         <p:nvSpPr>
-          <p:cNvPr id="21" name="Text 17"/>
+          <p:cNvPr id="21" name="Text 16"/>
           <p:cNvSpPr txBox="1"/>
           <p:nvPr/>
         </p:nvSpPr>
@@ -1795,7 +1766,7 @@
       </p:sp>
       <p:sp>
         <p:nvSpPr>
-          <p:cNvPr id="22" name="Text 18"/>
+          <p:cNvPr id="22" name="Text 17"/>
           <p:cNvSpPr txBox="1"/>
           <p:nvPr/>
         </p:nvSpPr>
@@ -1834,7 +1805,7 @@
       </p:sp>
       <p:sp>
         <p:nvSpPr>
-          <p:cNvPr id="23" name="Text 19"/>
+          <p:cNvPr id="23" name="Text 18"/>
           <p:cNvSpPr txBox="1"/>
           <p:nvPr/>
         </p:nvSpPr>
@@ -1873,7 +1844,7 @@
       </p:sp>
       <p:sp>
         <p:nvSpPr>
-          <p:cNvPr id="24" name="Shape 20"/>
+          <p:cNvPr id="24" name="Shape 19"/>
           <p:cNvSpPr/>
           <p:nvPr/>
         </p:nvSpPr>
@@ -1900,7 +1871,7 @@
       </p:sp>
       <p:sp>
         <p:nvSpPr>
-          <p:cNvPr id="25" name="Shape 21"/>
+          <p:cNvPr id="25" name="Shape 20"/>
           <p:cNvSpPr/>
           <p:nvPr/>
         </p:nvSpPr>
@@ -1925,7 +1896,7 @@
       </p:sp>
       <p:sp>
         <p:nvSpPr>
-          <p:cNvPr id="26" name="Text 22"/>
+          <p:cNvPr id="26" name="Text 21"/>
           <p:cNvSpPr txBox="1"/>
           <p:nvPr/>
         </p:nvSpPr>
@@ -1964,7 +1935,7 @@
       </p:sp>
       <p:sp>
         <p:nvSpPr>
-          <p:cNvPr id="27" name="Text 23"/>
+          <p:cNvPr id="27" name="Text 22"/>
           <p:cNvSpPr txBox="1"/>
           <p:nvPr/>
         </p:nvSpPr>
@@ -2003,7 +1974,7 @@
       </p:sp>
       <p:sp>
         <p:nvSpPr>
-          <p:cNvPr id="28" name="Text 24"/>
+          <p:cNvPr id="28" name="Text 23"/>
           <p:cNvSpPr txBox="1"/>
           <p:nvPr/>
         </p:nvSpPr>
@@ -2042,7 +2013,7 @@
       </p:sp>
       <p:sp>
         <p:nvSpPr>
-          <p:cNvPr id="29" name="Shape 25"/>
+          <p:cNvPr id="29" name="Shape 24"/>
           <p:cNvSpPr/>
           <p:nvPr/>
         </p:nvSpPr>
@@ -2069,7 +2040,7 @@
       </p:sp>
       <p:sp>
         <p:nvSpPr>
-          <p:cNvPr id="30" name="Shape 26"/>
+          <p:cNvPr id="30" name="Shape 25"/>
           <p:cNvSpPr/>
           <p:nvPr/>
         </p:nvSpPr>
@@ -2094,7 +2065,7 @@
       </p:sp>
       <p:sp>
         <p:nvSpPr>
-          <p:cNvPr id="31" name="Text 27"/>
+          <p:cNvPr id="31" name="Text 26"/>
           <p:cNvSpPr txBox="1"/>
           <p:nvPr/>
         </p:nvSpPr>
@@ -2133,7 +2104,7 @@
       </p:sp>
       <p:sp>
         <p:nvSpPr>
-          <p:cNvPr id="32" name="Text 28"/>
+          <p:cNvPr id="32" name="Text 27"/>
           <p:cNvSpPr txBox="1"/>
           <p:nvPr/>
         </p:nvSpPr>
@@ -2172,7 +2143,7 @@
       </p:sp>
       <p:sp>
         <p:nvSpPr>
-          <p:cNvPr id="33" name="Text 29"/>
+          <p:cNvPr id="33" name="Text 28"/>
           <p:cNvSpPr txBox="1"/>
           <p:nvPr/>
         </p:nvSpPr>
@@ -2211,7 +2182,7 @@
       </p:sp>
       <p:sp>
         <p:nvSpPr>
-          <p:cNvPr id="34" name="Shape 30"/>
+          <p:cNvPr id="34" name="Shape 29"/>
           <p:cNvSpPr/>
           <p:nvPr/>
         </p:nvSpPr>
@@ -2238,7 +2209,7 @@
       </p:sp>
       <p:sp>
         <p:nvSpPr>
-          <p:cNvPr id="35" name="Shape 31"/>
+          <p:cNvPr id="35" name="Shape 30"/>
           <p:cNvSpPr/>
           <p:nvPr/>
         </p:nvSpPr>
@@ -2263,7 +2234,7 @@
       </p:sp>
       <p:sp>
         <p:nvSpPr>
-          <p:cNvPr id="36" name="Text 32"/>
+          <p:cNvPr id="36" name="Text 31"/>
           <p:cNvSpPr txBox="1"/>
           <p:nvPr/>
         </p:nvSpPr>
@@ -2302,7 +2273,7 @@
       </p:sp>
       <p:sp>
         <p:nvSpPr>
-          <p:cNvPr id="37" name="Text 33"/>
+          <p:cNvPr id="37" name="Text 32"/>
           <p:cNvSpPr txBox="1"/>
           <p:nvPr/>
         </p:nvSpPr>
@@ -2341,7 +2312,7 @@
       </p:sp>
       <p:sp>
         <p:nvSpPr>
-          <p:cNvPr id="38" name="Text 34"/>
+          <p:cNvPr id="38" name="Text 33"/>
           <p:cNvSpPr txBox="1"/>
           <p:nvPr/>
         </p:nvSpPr>
@@ -2380,7 +2351,7 @@
       </p:sp>
       <p:sp>
         <p:nvSpPr>
-          <p:cNvPr id="39" name="Shape 35"/>
+          <p:cNvPr id="39" name="Shape 34"/>
           <p:cNvSpPr/>
           <p:nvPr/>
         </p:nvSpPr>
@@ -2407,7 +2378,7 @@
       </p:sp>
       <p:sp>
         <p:nvSpPr>
-          <p:cNvPr id="40" name="Shape 36"/>
+          <p:cNvPr id="40" name="Shape 35"/>
           <p:cNvSpPr/>
           <p:nvPr/>
         </p:nvSpPr>
@@ -2432,7 +2403,7 @@
       </p:sp>
       <p:sp>
         <p:nvSpPr>
-          <p:cNvPr id="41" name="Text 37"/>
+          <p:cNvPr id="41" name="Text 36"/>
           <p:cNvSpPr txBox="1"/>
           <p:nvPr/>
         </p:nvSpPr>
@@ -2471,7 +2442,7 @@
       </p:sp>
       <p:sp>
         <p:nvSpPr>
-          <p:cNvPr id="42" name="Text 38"/>
+          <p:cNvPr id="42" name="Text 37"/>
           <p:cNvSpPr txBox="1"/>
           <p:nvPr/>
         </p:nvSpPr>
@@ -2510,7 +2481,7 @@
       </p:sp>
       <p:sp>
         <p:nvSpPr>
-          <p:cNvPr id="43" name="Text 39"/>
+          <p:cNvPr id="43" name="Text 38"/>
           <p:cNvSpPr txBox="1"/>
           <p:nvPr/>
         </p:nvSpPr>
@@ -2549,7 +2520,7 @@
       </p:sp>
       <p:sp>
         <p:nvSpPr>
-          <p:cNvPr id="44" name="Shape 40"/>
+          <p:cNvPr id="44" name="Shape 39"/>
           <p:cNvSpPr/>
           <p:nvPr/>
         </p:nvSpPr>
@@ -2576,7 +2547,7 @@
       </p:sp>
       <p:sp>
         <p:nvSpPr>
-          <p:cNvPr id="45" name="Shape 41"/>
+          <p:cNvPr id="45" name="Shape 40"/>
           <p:cNvSpPr/>
           <p:nvPr/>
         </p:nvSpPr>
@@ -2601,7 +2572,7 @@
       </p:sp>
       <p:sp>
         <p:nvSpPr>
-          <p:cNvPr id="46" name="Text 42"/>
+          <p:cNvPr id="46" name="Text 41"/>
           <p:cNvSpPr txBox="1"/>
           <p:nvPr/>
         </p:nvSpPr>
@@ -2640,7 +2611,7 @@
       </p:sp>
       <p:sp>
         <p:nvSpPr>
-          <p:cNvPr id="47" name="Text 43"/>
+          <p:cNvPr id="47" name="Text 42"/>
           <p:cNvSpPr txBox="1"/>
           <p:nvPr/>
         </p:nvSpPr>
@@ -2679,7 +2650,7 @@
       </p:sp>
       <p:sp>
         <p:nvSpPr>
-          <p:cNvPr id="48" name="Text 44"/>
+          <p:cNvPr id="48" name="Text 43"/>
           <p:cNvSpPr txBox="1"/>
           <p:nvPr/>
         </p:nvSpPr>
@@ -2718,7 +2689,7 @@
       </p:sp>
       <p:sp>
         <p:nvSpPr>
-          <p:cNvPr id="49" name="Shape 45"/>
+          <p:cNvPr id="49" name="Shape 44"/>
           <p:cNvSpPr/>
           <p:nvPr/>
         </p:nvSpPr>
@@ -2745,7 +2716,7 @@
       </p:sp>
       <p:sp>
         <p:nvSpPr>
-          <p:cNvPr id="50" name="Shape 46"/>
+          <p:cNvPr id="50" name="Shape 45"/>
           <p:cNvSpPr/>
           <p:nvPr/>
         </p:nvSpPr>
@@ -2770,7 +2741,7 @@
       </p:sp>
       <p:sp>
         <p:nvSpPr>
-          <p:cNvPr id="51" name="Text 47"/>
+          <p:cNvPr id="51" name="Text 46"/>
           <p:cNvSpPr txBox="1"/>
           <p:nvPr/>
         </p:nvSpPr>
@@ -2809,7 +2780,7 @@
       </p:sp>
       <p:sp>
         <p:nvSpPr>
-          <p:cNvPr id="52" name="Text 48"/>
+          <p:cNvPr id="52" name="Text 47"/>
           <p:cNvSpPr txBox="1"/>
           <p:nvPr/>
         </p:nvSpPr>
@@ -2848,7 +2819,7 @@
       </p:sp>
       <p:sp>
         <p:nvSpPr>
-          <p:cNvPr id="53" name="Text 49"/>
+          <p:cNvPr id="53" name="Text 48"/>
           <p:cNvSpPr txBox="1"/>
           <p:nvPr/>
         </p:nvSpPr>
@@ -2887,7 +2858,7 @@
       </p:sp>
       <p:sp>
         <p:nvSpPr>
-          <p:cNvPr id="54" name="Shape 50"/>
+          <p:cNvPr id="54" name="Shape 49"/>
           <p:cNvSpPr/>
           <p:nvPr/>
         </p:nvSpPr>
@@ -2914,7 +2885,7 @@
       </p:sp>
       <p:sp>
         <p:nvSpPr>
-          <p:cNvPr id="55" name="Shape 51"/>
+          <p:cNvPr id="55" name="Shape 50"/>
           <p:cNvSpPr/>
           <p:nvPr/>
         </p:nvSpPr>
@@ -2939,7 +2910,7 @@
       </p:sp>
       <p:sp>
         <p:nvSpPr>
-          <p:cNvPr id="56" name="Text 52"/>
+          <p:cNvPr id="56" name="Text 51"/>
           <p:cNvSpPr txBox="1"/>
           <p:nvPr/>
         </p:nvSpPr>
@@ -2978,7 +2949,7 @@
       </p:sp>
       <p:sp>
         <p:nvSpPr>
-          <p:cNvPr id="57" name="Text 53"/>
+          <p:cNvPr id="57" name="Text 52"/>
           <p:cNvSpPr txBox="1"/>
           <p:nvPr/>
         </p:nvSpPr>
@@ -3017,7 +2988,7 @@
       </p:sp>
       <p:sp>
         <p:nvSpPr>
-          <p:cNvPr id="58" name="Text 54"/>
+          <p:cNvPr id="58" name="Text 53"/>
           <p:cNvSpPr txBox="1"/>
           <p:nvPr/>
         </p:nvSpPr>
@@ -3056,7 +3027,7 @@
       </p:sp>
       <p:sp>
         <p:nvSpPr>
-          <p:cNvPr id="59" name="Shape 55"/>
+          <p:cNvPr id="59" name="Shape 54"/>
           <p:cNvSpPr/>
           <p:nvPr/>
         </p:nvSpPr>
@@ -3083,7 +3054,7 @@
       </p:sp>
       <p:sp>
         <p:nvSpPr>
-          <p:cNvPr id="60" name="Shape 56"/>
+          <p:cNvPr id="60" name="Shape 55"/>
           <p:cNvSpPr/>
           <p:nvPr/>
         </p:nvSpPr>
@@ -3108,7 +3079,7 @@
       </p:sp>
       <p:sp>
         <p:nvSpPr>
-          <p:cNvPr id="61" name="Text 57"/>
+          <p:cNvPr id="61" name="Text 56"/>
           <p:cNvSpPr txBox="1"/>
           <p:nvPr/>
         </p:nvSpPr>
@@ -3147,7 +3118,7 @@
       </p:sp>
       <p:sp>
         <p:nvSpPr>
-          <p:cNvPr id="62" name="Text 58"/>
+          <p:cNvPr id="62" name="Text 57"/>
           <p:cNvSpPr txBox="1"/>
           <p:nvPr/>
         </p:nvSpPr>
@@ -3186,7 +3157,7 @@
       </p:sp>
       <p:sp>
         <p:nvSpPr>
-          <p:cNvPr id="63" name="Text 59"/>
+          <p:cNvPr id="63" name="Text 58"/>
           <p:cNvSpPr txBox="1"/>
           <p:nvPr/>
         </p:nvSpPr>
@@ -3225,7 +3196,7 @@
       </p:sp>
       <p:sp>
         <p:nvSpPr>
-          <p:cNvPr id="64" name="Shape 60"/>
+          <p:cNvPr id="64" name="Shape 59"/>
           <p:cNvSpPr/>
           <p:nvPr/>
         </p:nvSpPr>
@@ -3252,7 +3223,7 @@
       </p:sp>
       <p:sp>
         <p:nvSpPr>
-          <p:cNvPr id="65" name="Shape 61"/>
+          <p:cNvPr id="65" name="Shape 60"/>
           <p:cNvSpPr/>
           <p:nvPr/>
         </p:nvSpPr>
@@ -3277,7 +3248,7 @@
       </p:sp>
       <p:sp>
         <p:nvSpPr>
-          <p:cNvPr id="66" name="Text 62"/>
+          <p:cNvPr id="66" name="Text 61"/>
           <p:cNvSpPr txBox="1"/>
           <p:nvPr/>
         </p:nvSpPr>
@@ -3316,7 +3287,7 @@
       </p:sp>
       <p:sp>
         <p:nvSpPr>
-          <p:cNvPr id="67" name="Text 63"/>
+          <p:cNvPr id="67" name="Text 62"/>
           <p:cNvSpPr txBox="1"/>
           <p:nvPr/>
         </p:nvSpPr>
@@ -3355,7 +3326,7 @@
       </p:sp>
       <p:sp>
         <p:nvSpPr>
-          <p:cNvPr id="68" name="Text 64"/>
+          <p:cNvPr id="68" name="Text 63"/>
           <p:cNvSpPr txBox="1"/>
           <p:nvPr/>
         </p:nvSpPr>
@@ -3394,7 +3365,7 @@
       </p:sp>
       <p:sp>
         <p:nvSpPr>
-          <p:cNvPr id="69" name="Shape 65"/>
+          <p:cNvPr id="69" name="Shape 64"/>
           <p:cNvSpPr/>
           <p:nvPr/>
         </p:nvSpPr>
@@ -3421,7 +3392,7 @@
       </p:sp>
       <p:sp>
         <p:nvSpPr>
-          <p:cNvPr id="70" name="Shape 66"/>
+          <p:cNvPr id="70" name="Shape 65"/>
           <p:cNvSpPr/>
           <p:nvPr/>
         </p:nvSpPr>
@@ -3446,7 +3417,7 @@
       </p:sp>
       <p:sp>
         <p:nvSpPr>
-          <p:cNvPr id="71" name="Text 67"/>
+          <p:cNvPr id="71" name="Text 66"/>
           <p:cNvSpPr txBox="1"/>
           <p:nvPr/>
         </p:nvSpPr>
@@ -3485,7 +3456,7 @@
       </p:sp>
       <p:sp>
         <p:nvSpPr>
-          <p:cNvPr id="72" name="Text 68"/>
+          <p:cNvPr id="72" name="Text 67"/>
           <p:cNvSpPr txBox="1"/>
           <p:nvPr/>
         </p:nvSpPr>
@@ -3524,7 +3495,7 @@
       </p:sp>
       <p:sp>
         <p:nvSpPr>
-          <p:cNvPr id="73" name="Text 69"/>
+          <p:cNvPr id="73" name="Text 68"/>
           <p:cNvSpPr txBox="1"/>
           <p:nvPr/>
         </p:nvSpPr>
@@ -3563,7 +3534,7 @@
       </p:sp>
       <p:sp>
         <p:nvSpPr>
-          <p:cNvPr id="74" name="Shape 70"/>
+          <p:cNvPr id="74" name="Shape 69"/>
           <p:cNvSpPr/>
           <p:nvPr/>
         </p:nvSpPr>
@@ -3590,7 +3561,7 @@
       </p:sp>
       <p:sp>
         <p:nvSpPr>
-          <p:cNvPr id="75" name="Shape 71"/>
+          <p:cNvPr id="75" name="Shape 70"/>
           <p:cNvSpPr/>
           <p:nvPr/>
         </p:nvSpPr>
@@ -3615,7 +3586,7 @@
       </p:sp>
       <p:sp>
         <p:nvSpPr>
-          <p:cNvPr id="76" name="Text 72"/>
+          <p:cNvPr id="76" name="Text 71"/>
           <p:cNvSpPr txBox="1"/>
           <p:nvPr/>
         </p:nvSpPr>
@@ -3654,7 +3625,7 @@
       </p:sp>
       <p:sp>
         <p:nvSpPr>
-          <p:cNvPr id="77" name="Text 73"/>
+          <p:cNvPr id="77" name="Text 72"/>
           <p:cNvSpPr txBox="1"/>
           <p:nvPr/>
         </p:nvSpPr>
@@ -3693,7 +3664,7 @@
       </p:sp>
       <p:sp>
         <p:nvSpPr>
-          <p:cNvPr id="78" name="Text 74"/>
+          <p:cNvPr id="78" name="Text 73"/>
           <p:cNvSpPr txBox="1"/>
           <p:nvPr/>
         </p:nvSpPr>
@@ -3732,7 +3703,7 @@
       </p:sp>
       <p:sp>
         <p:nvSpPr>
-          <p:cNvPr id="79" name="Shape 75"/>
+          <p:cNvPr id="79" name="Shape 74"/>
           <p:cNvSpPr/>
           <p:nvPr/>
         </p:nvSpPr>
@@ -3759,7 +3730,7 @@
       </p:sp>
       <p:sp>
         <p:nvSpPr>
-          <p:cNvPr id="80" name="Shape 76"/>
+          <p:cNvPr id="80" name="Shape 75"/>
           <p:cNvSpPr/>
           <p:nvPr/>
         </p:nvSpPr>
@@ -3784,7 +3755,7 @@
       </p:sp>
       <p:sp>
         <p:nvSpPr>
-          <p:cNvPr id="81" name="Text 77"/>
+          <p:cNvPr id="81" name="Text 76"/>
           <p:cNvSpPr txBox="1"/>
           <p:nvPr/>
         </p:nvSpPr>
@@ -3823,7 +3794,7 @@
       </p:sp>
       <p:sp>
         <p:nvSpPr>
-          <p:cNvPr id="82" name="Text 78"/>
+          <p:cNvPr id="82" name="Text 77"/>
           <p:cNvSpPr txBox="1"/>
           <p:nvPr/>
         </p:nvSpPr>
@@ -3862,7 +3833,7 @@
       </p:sp>
       <p:sp>
         <p:nvSpPr>
-          <p:cNvPr id="83" name="Text 79"/>
+          <p:cNvPr id="83" name="Text 78"/>
           <p:cNvSpPr txBox="1"/>
           <p:nvPr/>
         </p:nvSpPr>
@@ -3901,7 +3872,7 @@
       </p:sp>
       <p:sp>
         <p:nvSpPr>
-          <p:cNvPr id="84" name="Shape 80"/>
+          <p:cNvPr id="84" name="Shape 79"/>
           <p:cNvSpPr/>
           <p:nvPr/>
         </p:nvSpPr>
@@ -3928,7 +3899,7 @@
       </p:sp>
       <p:sp>
         <p:nvSpPr>
-          <p:cNvPr id="85" name="Shape 81"/>
+          <p:cNvPr id="85" name="Shape 80"/>
           <p:cNvSpPr/>
           <p:nvPr/>
         </p:nvSpPr>
@@ -3953,7 +3924,7 @@
       </p:sp>
       <p:sp>
         <p:nvSpPr>
-          <p:cNvPr id="86" name="Text 82"/>
+          <p:cNvPr id="86" name="Text 81"/>
           <p:cNvSpPr txBox="1"/>
           <p:nvPr/>
         </p:nvSpPr>
@@ -3992,7 +3963,7 @@
       </p:sp>
       <p:sp>
         <p:nvSpPr>
-          <p:cNvPr id="87" name="Text 83"/>
+          <p:cNvPr id="87" name="Text 82"/>
           <p:cNvSpPr txBox="1"/>
           <p:nvPr/>
         </p:nvSpPr>
@@ -4031,7 +4002,7 @@
       </p:sp>
       <p:sp>
         <p:nvSpPr>
-          <p:cNvPr id="88" name="Text 84"/>
+          <p:cNvPr id="88" name="Text 83"/>
           <p:cNvSpPr txBox="1"/>
           <p:nvPr/>
         </p:nvSpPr>

--- a/videoslides/arbeitsblatt-textgleichungen-loesungen-a4.pptx
+++ b/videoslides/arbeitsblatt-textgleichungen-loesungen-a4.pptx
@@ -631,7 +631,7 @@
                 <a:ea typeface="Poppins" pitchFamily="34" charset="-122"/>
                 <a:cs typeface="Poppins" pitchFamily="34" charset="-120"/>
               </a:rPr>
-              <a:t>Cleverbox · Mathematik · Arbeitsblatt</a:t>
+              <a:t>Cleverbox · Mathematik · Lösungen</a:t>
             </a:r>
             <a:endParaRPr lang="en-US" sz="1100" dirty="0"/>
           </a:p>
@@ -702,7 +702,7 @@
                 <a:ea typeface="Poppins" pitchFamily="34" charset="-122"/>
                 <a:cs typeface="Poppins" pitchFamily="34" charset="-120"/>
               </a:rPr>
-              <a:t>Cleverbox · Mathematik · Arbeitsblatt</a:t>
+              <a:t>Cleverbox · Mathematik · Lösungen</a:t>
             </a:r>
             <a:endParaRPr lang="en-US" sz="1100" dirty="0"/>
           </a:p>
@@ -773,7 +773,7 @@
                 <a:ea typeface="Poppins" pitchFamily="34" charset="-122"/>
                 <a:cs typeface="Poppins" pitchFamily="34" charset="-120"/>
               </a:rPr>
-              <a:t>Cleverbox · Mathematik · Arbeitsblatt</a:t>
+              <a:t>Cleverbox · Mathematik · Lösungen</a:t>
             </a:r>
             <a:endParaRPr lang="en-US" sz="1100" dirty="0"/>
           </a:p>
